--- a/docs/example6_walkthrough.pptx
+++ b/docs/example6_walkthrough.pptx
@@ -8,6 +8,7 @@
     <p:sldId id="256" r:id="rId7"/>
     <p:sldId id="257" r:id="rId8"/>
     <p:sldId id="258" r:id="rId9"/>
+    <p:sldId id="259" r:id="rId10"/>
   </p:sldIdLst>
   <p:sldSz cx="9144000" cy="6858000" type="screen4x3"/>
   <p:notesSz cx="6858000" cy="9144000"/>
@@ -3243,7 +3244,7 @@
                 </a:solidFill>
                 <a:latin typeface="Aptos"/>
               </a:rPr>
-              <a:t>We want an </a:t>
+              <a:t>We want to union any number of sets (</a:t>
             </a:r>
             <a:r>
               <a:rPr sz="1600">
@@ -3252,7 +3253,7 @@
                 </a:solidFill>
                 <a:latin typeface="Consolas"/>
               </a:rPr>
-              <a:t>HtmlBuffer</a:t>
+              <a:t>RangeSetBlaze&lt;T&gt;</a:t>
             </a:r>
             <a:r>
               <a:rPr sz="1600">
@@ -3261,7 +3262,7 @@
                 </a:solidFill>
                 <a:latin typeface="Aptos"/>
               </a:rPr>
-              <a:t> to feel like a string for everyday method calls, while still being its own distinct type. Note that </a:t>
+              <a:t>). In OO terms, any collection that is an iterable of </a:t>
             </a:r>
             <a:r>
               <a:rPr sz="1600">
@@ -3270,7 +3271,7 @@
                 </a:solidFill>
                 <a:latin typeface="Consolas"/>
               </a:rPr>
-              <a:t>String</a:t>
+              <a:t>RangeSetBlaze&lt;T&gt;</a:t>
             </a:r>
             <a:r>
               <a:rPr sz="1600">
@@ -3279,7 +3280,7 @@
                 </a:solidFill>
                 <a:latin typeface="Aptos"/>
               </a:rPr>
-              <a:t> is a concrete type with storage, not just an interface/trait/abstract base class.</a:t>
+              <a:t> references should inherit this operation.</a:t>
             </a:r>
           </a:p>
         </p:txBody>
@@ -3300,8 +3301,8 @@
         </p:blipFill>
         <p:spPr>
           <a:xfrm>
-            <a:off x="2606213" y="1691640"/>
-            <a:ext cx="2331373" cy="4846320"/>
+            <a:off x="433134" y="1691640"/>
+            <a:ext cx="6677530" cy="4846320"/>
           </a:xfrm>
           <a:prstGeom prst="rect">
             <a:avLst/>
@@ -3432,7 +3433,7 @@
             <a:r>
               <a:rPr sz="1600">
                 <a:solidFill>
-                  <a:srgbClr val="EEFFFF"/>
+                  <a:srgbClr val="BAC2DE"/>
                 </a:solidFill>
                 <a:latin typeface="Consolas"/>
               </a:rPr>
@@ -3445,79 +3446,25 @@
                 </a:solidFill>
                 <a:latin typeface="Consolas"/>
               </a:rPr>
-              <a:t>ops</a:t>
-            </a:r>
-            <a:r>
-              <a:rPr sz="1600">
-                <a:solidFill>
-                  <a:srgbClr val="EEFFFF"/>
-                </a:solidFill>
-                <a:latin typeface="Consolas"/>
-              </a:rPr>
-              <a:t>:</a:t>
-            </a:r>
-            <a:r>
-              <a:rPr sz="1600">
-                <a:solidFill>
-                  <a:srgbClr val="EEFFFF"/>
-                </a:solidFill>
-                <a:latin typeface="Consolas"/>
-              </a:rPr>
-              <a:t>:</a:t>
-            </a:r>
-            <a:r>
-              <a:rPr sz="1600">
-                <a:solidFill>
-                  <a:srgbClr val="BAC2DE"/>
-                </a:solidFill>
-                <a:latin typeface="Consolas"/>
-              </a:rPr>
-              <a:t>{</a:t>
-            </a:r>
-            <a:r>
-              <a:rPr sz="1600">
-                <a:solidFill>
-                  <a:srgbClr val="EEFFFF"/>
-                </a:solidFill>
-                <a:latin typeface="Consolas"/>
-              </a:rPr>
-              <a:t>Deref</a:t>
-            </a:r>
-            <a:r>
-              <a:rPr sz="1600">
-                <a:solidFill>
-                  <a:srgbClr val="BAC2DE"/>
-                </a:solidFill>
-                <a:latin typeface="Consolas"/>
-              </a:rPr>
-              <a:t>,</a:t>
-            </a:r>
-            <a:r>
-              <a:rPr sz="1600">
-                <a:solidFill>
-                  <a:srgbClr val="EEFFFF"/>
-                </a:solidFill>
-                <a:latin typeface="Consolas"/>
-              </a:rPr>
-              <a:t> </a:t>
-            </a:r>
-            <a:r>
-              <a:rPr sz="1600">
-                <a:solidFill>
-                  <a:srgbClr val="EEFFFF"/>
-                </a:solidFill>
-                <a:latin typeface="Consolas"/>
-              </a:rPr>
-              <a:t>DerefMut</a:t>
-            </a:r>
-            <a:r>
-              <a:rPr sz="1600">
-                <a:solidFill>
-                  <a:srgbClr val="BAC2DE"/>
-                </a:solidFill>
-                <a:latin typeface="Consolas"/>
-              </a:rPr>
-              <a:t>}</a:t>
+              <a:t>collections</a:t>
+            </a:r>
+            <a:r>
+              <a:rPr sz="1600">
+                <a:solidFill>
+                  <a:srgbClr val="BAC2DE"/>
+                </a:solidFill>
+                <a:latin typeface="Consolas"/>
+              </a:rPr>
+              <a:t>::</a:t>
+            </a:r>
+            <a:r>
+              <a:rPr sz="1600">
+                <a:solidFill>
+                  <a:srgbClr val="EEFFFF"/>
+                </a:solidFill>
+                <a:latin typeface="Consolas"/>
+              </a:rPr>
+              <a:t>BTreeSet</a:t>
             </a:r>
             <a:r>
               <a:rPr sz="1600">
@@ -3557,65 +3504,11 @@
             <a:r>
               <a:rPr sz="1600">
                 <a:solidFill>
-                  <a:srgbClr val="C792EA"/>
-                </a:solidFill>
-                <a:latin typeface="Consolas"/>
-              </a:rPr>
-              <a:t>struct</a:t>
-            </a:r>
-            <a:r>
-              <a:rPr sz="1600">
-                <a:solidFill>
-                  <a:srgbClr val="EEFFFF"/>
-                </a:solidFill>
-                <a:latin typeface="Consolas"/>
-              </a:rPr>
-              <a:t> </a:t>
-            </a:r>
-            <a:r>
-              <a:rPr sz="1600">
-                <a:solidFill>
-                  <a:srgbClr val="FFCB6B"/>
-                </a:solidFill>
-                <a:latin typeface="Consolas"/>
-              </a:rPr>
-              <a:t>HtmlBuffer</a:t>
-            </a:r>
-            <a:r>
-              <a:rPr sz="1600">
-                <a:solidFill>
-                  <a:srgbClr val="BAC2DE"/>
-                </a:solidFill>
-                <a:latin typeface="Consolas"/>
-              </a:rPr>
-              <a:t>(</a:t>
-            </a:r>
-            <a:r>
-              <a:rPr sz="1600">
-                <a:solidFill>
-                  <a:srgbClr val="89DDFF"/>
-                </a:solidFill>
-                <a:latin typeface="Consolas"/>
-              </a:rPr>
-              <a:t>String</a:t>
-            </a:r>
-            <a:r>
-              <a:rPr sz="1600">
-                <a:solidFill>
-                  <a:srgbClr val="BAC2DE"/>
-                </a:solidFill>
-                <a:latin typeface="Consolas"/>
-              </a:rPr>
-              <a:t>)</a:t>
-            </a:r>
-            <a:r>
-              <a:rPr sz="1600">
-                <a:solidFill>
-                  <a:srgbClr val="BAC2DE"/>
-                </a:solidFill>
-                <a:latin typeface="Consolas"/>
-              </a:rPr>
-              <a:t>;</a:t>
+                  <a:srgbClr val="6A9955"/>
+                </a:solidFill>
+                <a:latin typeface="Consolas"/>
+              </a:rPr>
+              <a:t>// For this example, use u64 as our stand-in integer type.</a:t>
             </a:r>
           </a:p>
           <a:p>
@@ -3630,6 +3523,78 @@
                 <a:spcPts val="0"/>
               </a:spcAft>
             </a:pPr>
+            <a:r>
+              <a:rPr sz="1600">
+                <a:solidFill>
+                  <a:srgbClr val="C792EA"/>
+                </a:solidFill>
+                <a:latin typeface="Consolas"/>
+              </a:rPr>
+              <a:t>type</a:t>
+            </a:r>
+            <a:r>
+              <a:rPr sz="1600">
+                <a:solidFill>
+                  <a:srgbClr val="EEFFFF"/>
+                </a:solidFill>
+                <a:latin typeface="Consolas"/>
+              </a:rPr>
+              <a:t> </a:t>
+            </a:r>
+            <a:r>
+              <a:rPr sz="1600">
+                <a:solidFill>
+                  <a:srgbClr val="FFCB6B"/>
+                </a:solidFill>
+                <a:latin typeface="Consolas"/>
+              </a:rPr>
+              <a:t>Integer</a:t>
+            </a:r>
+            <a:r>
+              <a:rPr sz="1600">
+                <a:solidFill>
+                  <a:srgbClr val="EEFFFF"/>
+                </a:solidFill>
+                <a:latin typeface="Consolas"/>
+              </a:rPr>
+              <a:t> </a:t>
+            </a:r>
+            <a:r>
+              <a:rPr sz="1600">
+                <a:solidFill>
+                  <a:srgbClr val="89DDFF"/>
+                </a:solidFill>
+                <a:latin typeface="Consolas"/>
+              </a:rPr>
+              <a:t>=</a:t>
+            </a:r>
+            <a:r>
+              <a:rPr sz="1600">
+                <a:solidFill>
+                  <a:srgbClr val="EEFFFF"/>
+                </a:solidFill>
+                <a:latin typeface="Consolas"/>
+              </a:rPr>
+              <a:t> </a:t>
+            </a:r>
+            <a:r>
+              <a:rPr sz="1600">
+                <a:solidFill>
+                  <a:srgbClr val="C792EA"/>
+                </a:solidFill>
+                <a:latin typeface="Consolas"/>
+              </a:rPr>
+              <a:t>u64</a:t>
+            </a:r>
+            <a:r>
+              <a:rPr sz="1600">
+                <a:solidFill>
+                  <a:srgbClr val="BAC2DE"/>
+                </a:solidFill>
+                <a:latin typeface="Consolas"/>
+              </a:rPr>
+              <a:t>;</a:t>
+            </a:r>
           </a:p>
           <a:p>
             <a:pPr>
@@ -3643,51 +3608,6 @@
                 <a:spcPts val="0"/>
               </a:spcAft>
             </a:pPr>
-            <a:r>
-              <a:rPr sz="1600">
-                <a:solidFill>
-                  <a:srgbClr val="C792EA"/>
-                </a:solidFill>
-                <a:latin typeface="Consolas"/>
-              </a:rPr>
-              <a:t>impl</a:t>
-            </a:r>
-            <a:r>
-              <a:rPr sz="1600">
-                <a:solidFill>
-                  <a:srgbClr val="EEFFFF"/>
-                </a:solidFill>
-                <a:latin typeface="Consolas"/>
-              </a:rPr>
-              <a:t> </a:t>
-            </a:r>
-            <a:r>
-              <a:rPr sz="1600">
-                <a:solidFill>
-                  <a:srgbClr val="EEFFFF"/>
-                </a:solidFill>
-                <a:latin typeface="Consolas"/>
-              </a:rPr>
-              <a:t>HtmlBuffer</a:t>
-            </a:r>
-            <a:r>
-              <a:rPr sz="1600">
-                <a:solidFill>
-                  <a:srgbClr val="EEFFFF"/>
-                </a:solidFill>
-                <a:latin typeface="Consolas"/>
-              </a:rPr>
-              <a:t> </a:t>
-            </a:r>
-            <a:r>
-              <a:rPr sz="1600">
-                <a:solidFill>
-                  <a:srgbClr val="BAC2DE"/>
-                </a:solidFill>
-                <a:latin typeface="Consolas"/>
-              </a:rPr>
-              <a:t>{</a:t>
-            </a:r>
           </a:p>
           <a:p>
             <a:pPr>
@@ -3704,110 +3624,11 @@
             <a:r>
               <a:rPr sz="1600">
                 <a:solidFill>
-                  <a:srgbClr val="EEFFFF"/>
-                </a:solidFill>
-                <a:latin typeface="Consolas"/>
-              </a:rPr>
-              <a:t>    </a:t>
-            </a:r>
-            <a:r>
-              <a:rPr sz="1600">
-                <a:solidFill>
-                  <a:srgbClr val="C792EA"/>
-                </a:solidFill>
-                <a:latin typeface="Consolas"/>
-              </a:rPr>
-              <a:t>fn</a:t>
-            </a:r>
-            <a:r>
-              <a:rPr sz="1600">
-                <a:solidFill>
-                  <a:srgbClr val="EEFFFF"/>
-                </a:solidFill>
-                <a:latin typeface="Consolas"/>
-              </a:rPr>
-              <a:t> </a:t>
-            </a:r>
-            <a:r>
-              <a:rPr sz="1600">
-                <a:solidFill>
-                  <a:srgbClr val="82AAFF"/>
-                </a:solidFill>
-                <a:latin typeface="Consolas"/>
-              </a:rPr>
-              <a:t>new</a:t>
-            </a:r>
-            <a:r>
-              <a:rPr sz="1600">
-                <a:solidFill>
-                  <a:srgbClr val="BAC2DE"/>
-                </a:solidFill>
-                <a:latin typeface="Consolas"/>
-              </a:rPr>
-              <a:t>(</a:t>
-            </a:r>
-            <a:r>
-              <a:rPr sz="1600">
-                <a:solidFill>
-                  <a:srgbClr val="BAC2DE"/>
-                </a:solidFill>
-                <a:latin typeface="Consolas"/>
-              </a:rPr>
-              <a:t>)</a:t>
-            </a:r>
-            <a:r>
-              <a:rPr sz="1600">
-                <a:solidFill>
-                  <a:srgbClr val="EEFFFF"/>
-                </a:solidFill>
-                <a:latin typeface="Consolas"/>
-              </a:rPr>
-              <a:t> </a:t>
-            </a:r>
-            <a:r>
-              <a:rPr sz="1600">
-                <a:solidFill>
-                  <a:srgbClr val="EEFFFF"/>
-                </a:solidFill>
-                <a:latin typeface="Consolas"/>
-              </a:rPr>
-              <a:t>-&gt;</a:t>
-            </a:r>
-            <a:r>
-              <a:rPr sz="1600">
-                <a:solidFill>
-                  <a:srgbClr val="EEFFFF"/>
-                </a:solidFill>
-                <a:latin typeface="Consolas"/>
-              </a:rPr>
-              <a:t> </a:t>
-            </a:r>
-            <a:r>
-              <a:rPr sz="1600">
-                <a:solidFill>
-                  <a:srgbClr val="FFCB6B"/>
-                </a:solidFill>
-                <a:latin typeface="Consolas"/>
-              </a:rPr>
-              <a:t>Self</a:t>
-            </a:r>
-            <a:r>
-              <a:rPr sz="1600">
-                <a:solidFill>
-                  <a:srgbClr val="EEFFFF"/>
-                </a:solidFill>
-                <a:latin typeface="Consolas"/>
-              </a:rPr>
-              <a:t> </a:t>
-            </a:r>
-            <a:r>
-              <a:rPr sz="1600">
-                <a:solidFill>
-                  <a:srgbClr val="BAC2DE"/>
-                </a:solidFill>
-                <a:latin typeface="Consolas"/>
-              </a:rPr>
-              <a:t>{</a:t>
+                  <a:srgbClr val="6A9955"/>
+                </a:solidFill>
+                <a:latin typeface="Consolas"/>
+              </a:rPr>
+              <a:t>// Mock up RangeSetBlaze as a BTreeSet wrapper for demo purposes.</a:t>
             </a:r>
           </a:p>
           <a:p>
@@ -3825,83 +3646,29 @@
             <a:r>
               <a:rPr sz="1600">
                 <a:solidFill>
-                  <a:srgbClr val="EEFFFF"/>
-                </a:solidFill>
-                <a:latin typeface="Consolas"/>
-              </a:rPr>
-              <a:t>        </a:t>
-            </a:r>
-            <a:r>
-              <a:rPr sz="1600">
-                <a:solidFill>
-                  <a:srgbClr val="89DDFF"/>
-                </a:solidFill>
-                <a:latin typeface="Consolas"/>
-              </a:rPr>
-              <a:t>Self</a:t>
-            </a:r>
-            <a:r>
-              <a:rPr sz="1600">
-                <a:solidFill>
-                  <a:srgbClr val="BAC2DE"/>
-                </a:solidFill>
-                <a:latin typeface="Consolas"/>
-              </a:rPr>
-              <a:t>(</a:t>
-            </a:r>
-            <a:r>
-              <a:rPr sz="1600">
-                <a:solidFill>
-                  <a:srgbClr val="89DDFF"/>
-                </a:solidFill>
-                <a:latin typeface="Consolas"/>
-              </a:rPr>
-              <a:t>String</a:t>
-            </a:r>
-            <a:r>
-              <a:rPr sz="1600">
-                <a:solidFill>
-                  <a:srgbClr val="EEFFFF"/>
-                </a:solidFill>
-                <a:latin typeface="Consolas"/>
-              </a:rPr>
-              <a:t>::</a:t>
-            </a:r>
-            <a:r>
-              <a:rPr sz="1600">
-                <a:solidFill>
-                  <a:srgbClr val="EEFFFF"/>
-                </a:solidFill>
-                <a:latin typeface="Consolas"/>
-              </a:rPr>
-              <a:t>new</a:t>
-            </a:r>
-            <a:r>
-              <a:rPr sz="1600">
-                <a:solidFill>
-                  <a:srgbClr val="BAC2DE"/>
-                </a:solidFill>
-                <a:latin typeface="Consolas"/>
-              </a:rPr>
-              <a:t>(</a:t>
-            </a:r>
-            <a:r>
-              <a:rPr sz="1600">
-                <a:solidFill>
-                  <a:srgbClr val="BAC2DE"/>
-                </a:solidFill>
-                <a:latin typeface="Consolas"/>
-              </a:rPr>
-              <a:t>)</a:t>
-            </a:r>
-            <a:r>
-              <a:rPr sz="1600">
-                <a:solidFill>
-                  <a:srgbClr val="BAC2DE"/>
-                </a:solidFill>
-                <a:latin typeface="Consolas"/>
-              </a:rPr>
-              <a:t>)</a:t>
+                  <a:srgbClr val="6A9955"/>
+                </a:solidFill>
+                <a:latin typeface="Consolas"/>
+              </a:rPr>
+              <a:t>#[</a:t>
+            </a:r>
+            <a:r>
+              <a:rPr sz="1600">
+                <a:solidFill>
+                  <a:srgbClr val="6A9955"/>
+                </a:solidFill>
+                <a:latin typeface="Consolas"/>
+              </a:rPr>
+              <a:t>derive(Debug, Clone, PartialEq, Eq)</a:t>
+            </a:r>
+            <a:r>
+              <a:rPr sz="1600">
+                <a:solidFill>
+                  <a:srgbClr val="6A9955"/>
+                </a:solidFill>
+                <a:latin typeface="Consolas"/>
+              </a:rPr>
+              <a:t>]</a:t>
             </a:r>
           </a:p>
           <a:p>
@@ -3919,20 +3686,47 @@
             <a:r>
               <a:rPr sz="1600">
                 <a:solidFill>
-                  <a:srgbClr val="EEFFFF"/>
-                </a:solidFill>
-                <a:latin typeface="Consolas"/>
-              </a:rPr>
-              <a:t>    </a:t>
-            </a:r>
-            <a:r>
-              <a:rPr sz="1600">
-                <a:solidFill>
-                  <a:srgbClr val="BAC2DE"/>
-                </a:solidFill>
-                <a:latin typeface="Consolas"/>
-              </a:rPr>
-              <a:t>}</a:t>
+                  <a:srgbClr val="C792EA"/>
+                </a:solidFill>
+                <a:latin typeface="Consolas"/>
+              </a:rPr>
+              <a:t>struct</a:t>
+            </a:r>
+            <a:r>
+              <a:rPr sz="1600">
+                <a:solidFill>
+                  <a:srgbClr val="EEFFFF"/>
+                </a:solidFill>
+                <a:latin typeface="Consolas"/>
+              </a:rPr>
+              <a:t> </a:t>
+            </a:r>
+            <a:r>
+              <a:rPr sz="1600">
+                <a:solidFill>
+                  <a:srgbClr val="FFCB6B"/>
+                </a:solidFill>
+                <a:latin typeface="Consolas"/>
+              </a:rPr>
+              <a:t>RangeSetBlaze</a:t>
+            </a:r>
+            <a:r>
+              <a:rPr sz="1600">
+                <a:solidFill>
+                  <a:srgbClr val="EEFFFF"/>
+                </a:solidFill>
+                <a:latin typeface="Consolas"/>
+              </a:rPr>
+              <a:t> </a:t>
+            </a:r>
+            <a:r>
+              <a:rPr sz="1600">
+                <a:solidFill>
+                  <a:srgbClr val="BAC2DE"/>
+                </a:solidFill>
+                <a:latin typeface="Consolas"/>
+              </a:rPr>
+              <a:t>{</a:t>
             </a:r>
           </a:p>
           <a:p>
@@ -3950,11 +3744,83 @@
             <a:r>
               <a:rPr sz="1600">
                 <a:solidFill>
-                  <a:srgbClr val="BAC2DE"/>
-                </a:solidFill>
-                <a:latin typeface="Consolas"/>
-              </a:rPr>
-              <a:t>}</a:t>
+                  <a:srgbClr val="EEFFFF"/>
+                </a:solidFill>
+                <a:latin typeface="Consolas"/>
+              </a:rPr>
+              <a:t>    </a:t>
+            </a:r>
+            <a:r>
+              <a:rPr sz="1600">
+                <a:solidFill>
+                  <a:srgbClr val="EEFFFF"/>
+                </a:solidFill>
+                <a:latin typeface="Consolas"/>
+              </a:rPr>
+              <a:t>values</a:t>
+            </a:r>
+            <a:r>
+              <a:rPr sz="1600">
+                <a:solidFill>
+                  <a:srgbClr val="BAC2DE"/>
+                </a:solidFill>
+                <a:latin typeface="Consolas"/>
+              </a:rPr>
+              <a:t>:</a:t>
+            </a:r>
+            <a:r>
+              <a:rPr sz="1600">
+                <a:solidFill>
+                  <a:srgbClr val="EEFFFF"/>
+                </a:solidFill>
+                <a:latin typeface="Consolas"/>
+              </a:rPr>
+              <a:t> </a:t>
+            </a:r>
+            <a:r>
+              <a:rPr sz="1600">
+                <a:solidFill>
+                  <a:srgbClr val="FFCB6B"/>
+                </a:solidFill>
+                <a:latin typeface="Consolas"/>
+              </a:rPr>
+              <a:t>BTreeSet</a:t>
+            </a:r>
+            <a:r>
+              <a:rPr sz="1600">
+                <a:solidFill>
+                  <a:srgbClr val="89DDFF"/>
+                </a:solidFill>
+                <a:latin typeface="Consolas"/>
+              </a:rPr>
+              <a:t>&lt;</a:t>
+            </a:r>
+            <a:r>
+              <a:rPr sz="1600">
+                <a:solidFill>
+                  <a:srgbClr val="EEFFFF"/>
+                </a:solidFill>
+                <a:latin typeface="Consolas"/>
+              </a:rPr>
+              <a:t>Integer</a:t>
+            </a:r>
+            <a:r>
+              <a:rPr sz="1600">
+                <a:solidFill>
+                  <a:srgbClr val="89DDFF"/>
+                </a:solidFill>
+                <a:latin typeface="Consolas"/>
+              </a:rPr>
+              <a:t>&gt;</a:t>
+            </a:r>
+            <a:r>
+              <a:rPr sz="1600">
+                <a:solidFill>
+                  <a:srgbClr val="BAC2DE"/>
+                </a:solidFill>
+                <a:latin typeface="Consolas"/>
+              </a:rPr>
+              <a:t>,</a:t>
             </a:r>
           </a:p>
           <a:p>
@@ -3969,6 +3835,15 @@
                 <a:spcPts val="0"/>
               </a:spcAft>
             </a:pPr>
+            <a:r>
+              <a:rPr sz="1600">
+                <a:solidFill>
+                  <a:srgbClr val="BAC2DE"/>
+                </a:solidFill>
+                <a:latin typeface="Consolas"/>
+              </a:rPr>
+              <a:t>}</a:t>
+            </a:r>
           </a:p>
           <a:p>
             <a:pPr>
@@ -3982,87 +3857,6 @@
                 <a:spcPts val="0"/>
               </a:spcAft>
             </a:pPr>
-            <a:r>
-              <a:rPr sz="1600">
-                <a:solidFill>
-                  <a:srgbClr val="C792EA"/>
-                </a:solidFill>
-                <a:latin typeface="Consolas"/>
-              </a:rPr>
-              <a:t>impl</a:t>
-            </a:r>
-            <a:r>
-              <a:rPr sz="1600">
-                <a:solidFill>
-                  <a:srgbClr val="EEFFFF"/>
-                </a:solidFill>
-                <a:latin typeface="Consolas"/>
-              </a:rPr>
-              <a:t> </a:t>
-            </a:r>
-            <a:r>
-              <a:rPr sz="1600">
-                <a:solidFill>
-                  <a:srgbClr val="EEFFFF"/>
-                </a:solidFill>
-                <a:latin typeface="Consolas"/>
-              </a:rPr>
-              <a:t>Deref</a:t>
-            </a:r>
-            <a:r>
-              <a:rPr sz="1600">
-                <a:solidFill>
-                  <a:srgbClr val="EEFFFF"/>
-                </a:solidFill>
-                <a:latin typeface="Consolas"/>
-              </a:rPr>
-              <a:t> </a:t>
-            </a:r>
-            <a:r>
-              <a:rPr sz="1600">
-                <a:solidFill>
-                  <a:srgbClr val="C792EA"/>
-                </a:solidFill>
-                <a:latin typeface="Consolas"/>
-              </a:rPr>
-              <a:t>for</a:t>
-            </a:r>
-            <a:r>
-              <a:rPr sz="1600">
-                <a:solidFill>
-                  <a:srgbClr val="EEFFFF"/>
-                </a:solidFill>
-                <a:latin typeface="Consolas"/>
-              </a:rPr>
-              <a:t> </a:t>
-            </a:r>
-            <a:r>
-              <a:rPr sz="1600">
-                <a:solidFill>
-                  <a:srgbClr val="EEFFFF"/>
-                </a:solidFill>
-                <a:latin typeface="Consolas"/>
-              </a:rPr>
-              <a:t>HtmlBuffer</a:t>
-            </a:r>
-            <a:r>
-              <a:rPr sz="1600">
-                <a:solidFill>
-                  <a:srgbClr val="EEFFFF"/>
-                </a:solidFill>
-                <a:latin typeface="Consolas"/>
-              </a:rPr>
-              <a:t> </a:t>
-            </a:r>
-            <a:r>
-              <a:rPr sz="1600">
-                <a:solidFill>
-                  <a:srgbClr val="BAC2DE"/>
-                </a:solidFill>
-                <a:latin typeface="Consolas"/>
-              </a:rPr>
-              <a:t>{</a:t>
-            </a:r>
           </a:p>
           <a:p>
             <a:pPr>
@@ -4079,20 +3873,47 @@
             <a:r>
               <a:rPr sz="1600">
                 <a:solidFill>
-                  <a:srgbClr val="EEFFFF"/>
-                </a:solidFill>
-                <a:latin typeface="Consolas"/>
-              </a:rPr>
-              <a:t>    </a:t>
-            </a:r>
-            <a:r>
-              <a:rPr sz="1600">
-                <a:solidFill>
-                  <a:srgbClr val="6A9955"/>
-                </a:solidFill>
-                <a:latin typeface="Consolas"/>
-              </a:rPr>
-              <a:t>// Use when you want wrapper ergonomics that mostly feel like the inner type.</a:t>
+                  <a:srgbClr val="C792EA"/>
+                </a:solidFill>
+                <a:latin typeface="Consolas"/>
+              </a:rPr>
+              <a:t>impl</a:t>
+            </a:r>
+            <a:r>
+              <a:rPr sz="1600">
+                <a:solidFill>
+                  <a:srgbClr val="EEFFFF"/>
+                </a:solidFill>
+                <a:latin typeface="Consolas"/>
+              </a:rPr>
+              <a:t> </a:t>
+            </a:r>
+            <a:r>
+              <a:rPr sz="1600">
+                <a:solidFill>
+                  <a:srgbClr val="EEFFFF"/>
+                </a:solidFill>
+                <a:latin typeface="Consolas"/>
+              </a:rPr>
+              <a:t>RangeSetBlaze</a:t>
+            </a:r>
+            <a:r>
+              <a:rPr sz="1600">
+                <a:solidFill>
+                  <a:srgbClr val="EEFFFF"/>
+                </a:solidFill>
+                <a:latin typeface="Consolas"/>
+              </a:rPr>
+              <a:t> </a:t>
+            </a:r>
+            <a:r>
+              <a:rPr sz="1600">
+                <a:solidFill>
+                  <a:srgbClr val="BAC2DE"/>
+                </a:solidFill>
+                <a:latin typeface="Consolas"/>
+              </a:rPr>
+              <a:t>{</a:t>
             </a:r>
           </a:p>
           <a:p>
@@ -4123,7 +3944,61 @@
                 </a:solidFill>
                 <a:latin typeface="Consolas"/>
               </a:rPr>
-              <a:t>type</a:t>
+              <a:t>fn</a:t>
+            </a:r>
+            <a:r>
+              <a:rPr sz="1600">
+                <a:solidFill>
+                  <a:srgbClr val="EEFFFF"/>
+                </a:solidFill>
+                <a:latin typeface="Consolas"/>
+              </a:rPr>
+              <a:t> </a:t>
+            </a:r>
+            <a:r>
+              <a:rPr sz="1600">
+                <a:solidFill>
+                  <a:srgbClr val="82AAFF"/>
+                </a:solidFill>
+                <a:latin typeface="Consolas"/>
+              </a:rPr>
+              <a:t>new</a:t>
+            </a:r>
+            <a:r>
+              <a:rPr sz="1600">
+                <a:solidFill>
+                  <a:srgbClr val="BAC2DE"/>
+                </a:solidFill>
+                <a:latin typeface="Consolas"/>
+              </a:rPr>
+              <a:t>(</a:t>
+            </a:r>
+            <a:r>
+              <a:rPr sz="1600">
+                <a:solidFill>
+                  <a:srgbClr val="BAC2DE"/>
+                </a:solidFill>
+                <a:latin typeface="Consolas"/>
+              </a:rPr>
+              <a:t>)</a:t>
+            </a:r>
+            <a:r>
+              <a:rPr sz="1600">
+                <a:solidFill>
+                  <a:srgbClr val="EEFFFF"/>
+                </a:solidFill>
+                <a:latin typeface="Consolas"/>
+              </a:rPr>
+              <a:t> </a:t>
+            </a:r>
+            <a:r>
+              <a:rPr sz="1600">
+                <a:solidFill>
+                  <a:srgbClr val="BAC2DE"/>
+                </a:solidFill>
+                <a:latin typeface="Consolas"/>
+              </a:rPr>
+              <a:t>-&gt;</a:t>
             </a:r>
             <a:r>
               <a:rPr sz="1600">
@@ -4141,52 +4016,25 @@
                 </a:solidFill>
                 <a:latin typeface="Consolas"/>
               </a:rPr>
-              <a:t>Target</a:t>
-            </a:r>
-            <a:r>
-              <a:rPr sz="1600">
-                <a:solidFill>
-                  <a:srgbClr val="EEFFFF"/>
-                </a:solidFill>
-                <a:latin typeface="Consolas"/>
-              </a:rPr>
-              <a:t> </a:t>
-            </a:r>
-            <a:r>
-              <a:rPr sz="1600">
-                <a:solidFill>
-                  <a:srgbClr val="89DDFF"/>
-                </a:solidFill>
-                <a:latin typeface="Consolas"/>
-              </a:rPr>
-              <a:t>=</a:t>
-            </a:r>
-            <a:r>
-              <a:rPr sz="1600">
-                <a:solidFill>
-                  <a:srgbClr val="EEFFFF"/>
-                </a:solidFill>
-                <a:latin typeface="Consolas"/>
-              </a:rPr>
-              <a:t> </a:t>
-            </a:r>
-            <a:r>
-              <a:rPr sz="1600">
-                <a:solidFill>
-                  <a:srgbClr val="89DDFF"/>
-                </a:solidFill>
-                <a:latin typeface="Consolas"/>
-              </a:rPr>
-              <a:t>String</a:t>
-            </a:r>
-            <a:r>
-              <a:rPr sz="1600">
-                <a:solidFill>
-                  <a:srgbClr val="BAC2DE"/>
-                </a:solidFill>
-                <a:latin typeface="Consolas"/>
-              </a:rPr>
-              <a:t>;</a:t>
+              <a:t>Self</a:t>
+            </a:r>
+            <a:r>
+              <a:rPr sz="1600">
+                <a:solidFill>
+                  <a:srgbClr val="EEFFFF"/>
+                </a:solidFill>
+                <a:latin typeface="Consolas"/>
+              </a:rPr>
+              <a:t> </a:t>
+            </a:r>
+            <a:r>
+              <a:rPr sz="1600">
+                <a:solidFill>
+                  <a:srgbClr val="BAC2DE"/>
+                </a:solidFill>
+                <a:latin typeface="Consolas"/>
+              </a:rPr>
+              <a:t>{</a:t>
             </a:r>
           </a:p>
           <a:p>
@@ -4201,6 +4049,42 @@
                 <a:spcPts val="0"/>
               </a:spcAft>
             </a:pPr>
+            <a:r>
+              <a:rPr sz="1600">
+                <a:solidFill>
+                  <a:srgbClr val="EEFFFF"/>
+                </a:solidFill>
+                <a:latin typeface="Consolas"/>
+              </a:rPr>
+              <a:t>        </a:t>
+            </a:r>
+            <a:r>
+              <a:rPr sz="1600">
+                <a:solidFill>
+                  <a:srgbClr val="89DDFF"/>
+                </a:solidFill>
+                <a:latin typeface="Consolas"/>
+              </a:rPr>
+              <a:t>Self</a:t>
+            </a:r>
+            <a:r>
+              <a:rPr sz="1600">
+                <a:solidFill>
+                  <a:srgbClr val="EEFFFF"/>
+                </a:solidFill>
+                <a:latin typeface="Consolas"/>
+              </a:rPr>
+              <a:t> </a:t>
+            </a:r>
+            <a:r>
+              <a:rPr sz="1600">
+                <a:solidFill>
+                  <a:srgbClr val="BAC2DE"/>
+                </a:solidFill>
+                <a:latin typeface="Consolas"/>
+              </a:rPr>
+              <a:t>{</a:t>
+            </a:r>
           </a:p>
           <a:p>
             <a:pPr>
@@ -4221,34 +4105,61 @@
                 </a:solidFill>
                 <a:latin typeface="Consolas"/>
               </a:rPr>
-              <a:t>    </a:t>
-            </a:r>
-            <a:r>
-              <a:rPr sz="1600">
-                <a:solidFill>
-                  <a:srgbClr val="C792EA"/>
-                </a:solidFill>
-                <a:latin typeface="Consolas"/>
-              </a:rPr>
-              <a:t>fn</a:t>
-            </a:r>
-            <a:r>
-              <a:rPr sz="1600">
-                <a:solidFill>
-                  <a:srgbClr val="EEFFFF"/>
-                </a:solidFill>
-                <a:latin typeface="Consolas"/>
-              </a:rPr>
-              <a:t> </a:t>
-            </a:r>
-            <a:r>
-              <a:rPr sz="1600">
-                <a:solidFill>
-                  <a:srgbClr val="82AAFF"/>
-                </a:solidFill>
-                <a:latin typeface="Consolas"/>
-              </a:rPr>
-              <a:t>deref</a:t>
+              <a:t>            </a:t>
+            </a:r>
+            <a:r>
+              <a:rPr sz="1600">
+                <a:solidFill>
+                  <a:srgbClr val="EEFFFF"/>
+                </a:solidFill>
+                <a:latin typeface="Consolas"/>
+              </a:rPr>
+              <a:t>values</a:t>
+            </a:r>
+            <a:r>
+              <a:rPr sz="1600">
+                <a:solidFill>
+                  <a:srgbClr val="BAC2DE"/>
+                </a:solidFill>
+                <a:latin typeface="Consolas"/>
+              </a:rPr>
+              <a:t>:</a:t>
+            </a:r>
+            <a:r>
+              <a:rPr sz="1600">
+                <a:solidFill>
+                  <a:srgbClr val="EEFFFF"/>
+                </a:solidFill>
+                <a:latin typeface="Consolas"/>
+              </a:rPr>
+              <a:t> </a:t>
+            </a:r>
+            <a:r>
+              <a:rPr sz="1600">
+                <a:solidFill>
+                  <a:srgbClr val="FFCB6B"/>
+                </a:solidFill>
+                <a:latin typeface="Consolas"/>
+              </a:rPr>
+              <a:t>BTreeSet</a:t>
+            </a:r>
+            <a:r>
+              <a:rPr sz="1600">
+                <a:solidFill>
+                  <a:srgbClr val="BAC2DE"/>
+                </a:solidFill>
+                <a:latin typeface="Consolas"/>
+              </a:rPr>
+              <a:t>::</a:t>
+            </a:r>
+            <a:r>
+              <a:rPr sz="1600">
+                <a:solidFill>
+                  <a:srgbClr val="EEFFFF"/>
+                </a:solidFill>
+                <a:latin typeface="Consolas"/>
+              </a:rPr>
+              <a:t>new</a:t>
             </a:r>
             <a:r>
               <a:rPr sz="1600">
@@ -4262,24 +4173,6 @@
             <a:r>
               <a:rPr sz="1600">
                 <a:solidFill>
-                  <a:srgbClr val="89DDFF"/>
-                </a:solidFill>
-                <a:latin typeface="Consolas"/>
-              </a:rPr>
-              <a:t>&amp;</a:t>
-            </a:r>
-            <a:r>
-              <a:rPr sz="1600">
-                <a:solidFill>
-                  <a:srgbClr val="89DDFF"/>
-                </a:solidFill>
-                <a:latin typeface="Consolas"/>
-              </a:rPr>
-              <a:t>self</a:t>
-            </a:r>
-            <a:r>
-              <a:rPr sz="1600">
-                <a:solidFill>
                   <a:srgbClr val="BAC2DE"/>
                 </a:solidFill>
                 <a:latin typeface="Consolas"/>
@@ -4289,83 +4182,11 @@
             <a:r>
               <a:rPr sz="1600">
                 <a:solidFill>
-                  <a:srgbClr val="EEFFFF"/>
-                </a:solidFill>
-                <a:latin typeface="Consolas"/>
-              </a:rPr>
-              <a:t> </a:t>
-            </a:r>
-            <a:r>
-              <a:rPr sz="1600">
-                <a:solidFill>
-                  <a:srgbClr val="EEFFFF"/>
-                </a:solidFill>
-                <a:latin typeface="Consolas"/>
-              </a:rPr>
-              <a:t>-&gt;</a:t>
-            </a:r>
-            <a:r>
-              <a:rPr sz="1600">
-                <a:solidFill>
-                  <a:srgbClr val="EEFFFF"/>
-                </a:solidFill>
-                <a:latin typeface="Consolas"/>
-              </a:rPr>
-              <a:t> </a:t>
-            </a:r>
-            <a:r>
-              <a:rPr sz="1600">
-                <a:solidFill>
-                  <a:srgbClr val="C792EA"/>
-                </a:solidFill>
-                <a:latin typeface="Consolas"/>
-              </a:rPr>
-              <a:t>&amp;</a:t>
-            </a:r>
-            <a:r>
-              <a:rPr sz="1600">
-                <a:solidFill>
-                  <a:srgbClr val="FFCB6B"/>
-                </a:solidFill>
-                <a:latin typeface="Consolas"/>
-              </a:rPr>
-              <a:t>Self</a:t>
-            </a:r>
-            <a:r>
-              <a:rPr sz="1600">
-                <a:solidFill>
-                  <a:srgbClr val="EEFFFF"/>
-                </a:solidFill>
-                <a:latin typeface="Consolas"/>
-              </a:rPr>
-              <a:t>::</a:t>
-            </a:r>
-            <a:r>
-              <a:rPr sz="1600">
-                <a:solidFill>
-                  <a:srgbClr val="EEFFFF"/>
-                </a:solidFill>
-                <a:latin typeface="Consolas"/>
-              </a:rPr>
-              <a:t>Target</a:t>
-            </a:r>
-            <a:r>
-              <a:rPr sz="1600">
-                <a:solidFill>
-                  <a:srgbClr val="EEFFFF"/>
-                </a:solidFill>
-                <a:latin typeface="Consolas"/>
-              </a:rPr>
-              <a:t> </a:t>
-            </a:r>
-            <a:r>
-              <a:rPr sz="1600">
-                <a:solidFill>
-                  <a:srgbClr val="BAC2DE"/>
-                </a:solidFill>
-                <a:latin typeface="Consolas"/>
-              </a:rPr>
-              <a:t>{</a:t>
+                  <a:srgbClr val="BAC2DE"/>
+                </a:solidFill>
+                <a:latin typeface="Consolas"/>
+              </a:rPr>
+              <a:t>,</a:t>
             </a:r>
           </a:p>
           <a:p>
@@ -4392,38 +4213,11 @@
             <a:r>
               <a:rPr sz="1600">
                 <a:solidFill>
-                  <a:srgbClr val="89DDFF"/>
-                </a:solidFill>
-                <a:latin typeface="Consolas"/>
-              </a:rPr>
-              <a:t>&amp;</a:t>
-            </a:r>
-            <a:r>
-              <a:rPr sz="1600">
-                <a:solidFill>
-                  <a:srgbClr val="89DDFF"/>
-                </a:solidFill>
-                <a:latin typeface="Consolas"/>
-              </a:rPr>
-              <a:t>self</a:t>
-            </a:r>
-            <a:r>
-              <a:rPr sz="1600">
-                <a:solidFill>
-                  <a:srgbClr val="BAC2DE"/>
-                </a:solidFill>
-                <a:latin typeface="Consolas"/>
-              </a:rPr>
-              <a:t>.</a:t>
-            </a:r>
-            <a:r>
-              <a:rPr sz="1600">
-                <a:solidFill>
-                  <a:srgbClr val="F78C6C"/>
-                </a:solidFill>
-                <a:latin typeface="Consolas"/>
-              </a:rPr>
-              <a:t>0</a:t>
+                  <a:srgbClr val="BAC2DE"/>
+                </a:solidFill>
+                <a:latin typeface="Consolas"/>
+              </a:rPr>
+              <a:t>}</a:t>
             </a:r>
           </a:p>
           <a:p>
@@ -4469,15 +4263,6 @@
                 <a:spcPts val="0"/>
               </a:spcAft>
             </a:pPr>
-            <a:r>
-              <a:rPr sz="1600">
-                <a:solidFill>
-                  <a:srgbClr val="BAC2DE"/>
-                </a:solidFill>
-                <a:latin typeface="Consolas"/>
-              </a:rPr>
-              <a:t>}</a:t>
-            </a:r>
           </a:p>
           <a:p>
             <a:pPr>
@@ -4491,6 +4276,24 @@
                 <a:spcPts val="0"/>
               </a:spcAft>
             </a:pPr>
+            <a:r>
+              <a:rPr sz="1600">
+                <a:solidFill>
+                  <a:srgbClr val="EEFFFF"/>
+                </a:solidFill>
+                <a:latin typeface="Consolas"/>
+              </a:rPr>
+              <a:t>    </a:t>
+            </a:r>
+            <a:r>
+              <a:rPr sz="1600">
+                <a:solidFill>
+                  <a:srgbClr val="6A9955"/>
+                </a:solidFill>
+                <a:latin typeface="Consolas"/>
+              </a:rPr>
+              <a:t>// Construct from a slice of Integer values.</a:t>
+            </a:r>
           </a:p>
           <a:p>
             <a:pPr>
@@ -4507,29 +4310,65 @@
             <a:r>
               <a:rPr sz="1600">
                 <a:solidFill>
+                  <a:srgbClr val="EEFFFF"/>
+                </a:solidFill>
+                <a:latin typeface="Consolas"/>
+              </a:rPr>
+              <a:t>    </a:t>
+            </a:r>
+            <a:r>
+              <a:rPr sz="1600">
+                <a:solidFill>
                   <a:srgbClr val="C792EA"/>
                 </a:solidFill>
                 <a:latin typeface="Consolas"/>
               </a:rPr>
-              <a:t>impl</a:t>
-            </a:r>
-            <a:r>
-              <a:rPr sz="1600">
-                <a:solidFill>
-                  <a:srgbClr val="EEFFFF"/>
-                </a:solidFill>
-                <a:latin typeface="Consolas"/>
-              </a:rPr>
-              <a:t> </a:t>
-            </a:r>
-            <a:r>
-              <a:rPr sz="1600">
-                <a:solidFill>
-                  <a:srgbClr val="EEFFFF"/>
-                </a:solidFill>
-                <a:latin typeface="Consolas"/>
-              </a:rPr>
-              <a:t>DerefMut</a:t>
+              <a:t>fn</a:t>
+            </a:r>
+            <a:r>
+              <a:rPr sz="1600">
+                <a:solidFill>
+                  <a:srgbClr val="EEFFFF"/>
+                </a:solidFill>
+                <a:latin typeface="Consolas"/>
+              </a:rPr>
+              <a:t> </a:t>
+            </a:r>
+            <a:r>
+              <a:rPr sz="1600">
+                <a:solidFill>
+                  <a:srgbClr val="82AAFF"/>
+                </a:solidFill>
+                <a:latin typeface="Consolas"/>
+              </a:rPr>
+              <a:t>from_slice</a:t>
+            </a:r>
+            <a:r>
+              <a:rPr sz="1600">
+                <a:solidFill>
+                  <a:srgbClr val="BAC2DE"/>
+                </a:solidFill>
+                <a:latin typeface="Consolas"/>
+              </a:rPr>
+              <a:t>(</a:t>
+            </a:r>
+            <a:r>
+              <a:rPr sz="1600">
+                <a:solidFill>
+                  <a:srgbClr val="EEFFFF"/>
+                </a:solidFill>
+                <a:latin typeface="Consolas"/>
+              </a:rPr>
+              <a:t>values</a:t>
+            </a:r>
+            <a:r>
+              <a:rPr sz="1600">
+                <a:solidFill>
+                  <a:srgbClr val="BAC2DE"/>
+                </a:solidFill>
+                <a:latin typeface="Consolas"/>
+              </a:rPr>
+              <a:t>:</a:t>
             </a:r>
             <a:r>
               <a:rPr sz="1600">
@@ -4547,25 +4386,79 @@
                 </a:solidFill>
                 <a:latin typeface="Consolas"/>
               </a:rPr>
-              <a:t>for</a:t>
-            </a:r>
-            <a:r>
-              <a:rPr sz="1600">
-                <a:solidFill>
-                  <a:srgbClr val="EEFFFF"/>
-                </a:solidFill>
-                <a:latin typeface="Consolas"/>
-              </a:rPr>
-              <a:t> </a:t>
-            </a:r>
-            <a:r>
-              <a:rPr sz="1600">
-                <a:solidFill>
-                  <a:srgbClr val="EEFFFF"/>
-                </a:solidFill>
-                <a:latin typeface="Consolas"/>
-              </a:rPr>
-              <a:t>HtmlBuffer</a:t>
+              <a:t>&amp;</a:t>
+            </a:r>
+            <a:r>
+              <a:rPr sz="1600">
+                <a:solidFill>
+                  <a:srgbClr val="BAC2DE"/>
+                </a:solidFill>
+                <a:latin typeface="Consolas"/>
+              </a:rPr>
+              <a:t>[</a:t>
+            </a:r>
+            <a:r>
+              <a:rPr sz="1600">
+                <a:solidFill>
+                  <a:srgbClr val="EEFFFF"/>
+                </a:solidFill>
+                <a:latin typeface="Consolas"/>
+              </a:rPr>
+              <a:t>Integer</a:t>
+            </a:r>
+            <a:r>
+              <a:rPr sz="1600">
+                <a:solidFill>
+                  <a:srgbClr val="BAC2DE"/>
+                </a:solidFill>
+                <a:latin typeface="Consolas"/>
+              </a:rPr>
+              <a:t>]</a:t>
+            </a:r>
+            <a:r>
+              <a:rPr sz="1600">
+                <a:solidFill>
+                  <a:srgbClr val="BAC2DE"/>
+                </a:solidFill>
+                <a:latin typeface="Consolas"/>
+              </a:rPr>
+              <a:t>)</a:t>
+            </a:r>
+            <a:r>
+              <a:rPr sz="1600">
+                <a:solidFill>
+                  <a:srgbClr val="EEFFFF"/>
+                </a:solidFill>
+                <a:latin typeface="Consolas"/>
+              </a:rPr>
+              <a:t> </a:t>
+            </a:r>
+            <a:r>
+              <a:rPr sz="1600">
+                <a:solidFill>
+                  <a:srgbClr val="BAC2DE"/>
+                </a:solidFill>
+                <a:latin typeface="Consolas"/>
+              </a:rPr>
+              <a:t>-&gt;</a:t>
+            </a:r>
+            <a:r>
+              <a:rPr sz="1600">
+                <a:solidFill>
+                  <a:srgbClr val="EEFFFF"/>
+                </a:solidFill>
+                <a:latin typeface="Consolas"/>
+              </a:rPr>
+              <a:t> </a:t>
+            </a:r>
+            <a:r>
+              <a:rPr sz="1600">
+                <a:solidFill>
+                  <a:srgbClr val="FFCB6B"/>
+                </a:solidFill>
+                <a:latin typeface="Consolas"/>
+              </a:rPr>
+              <a:t>Self</a:t>
             </a:r>
             <a:r>
               <a:rPr sz="1600">
@@ -4605,43 +4498,7 @@
                 </a:solidFill>
                 <a:latin typeface="Consolas"/>
               </a:rPr>
-              <a:t>    </a:t>
-            </a:r>
-            <a:r>
-              <a:rPr sz="1600">
-                <a:solidFill>
-                  <a:srgbClr val="C792EA"/>
-                </a:solidFill>
-                <a:latin typeface="Consolas"/>
-              </a:rPr>
-              <a:t>fn</a:t>
-            </a:r>
-            <a:r>
-              <a:rPr sz="1600">
-                <a:solidFill>
-                  <a:srgbClr val="EEFFFF"/>
-                </a:solidFill>
-                <a:latin typeface="Consolas"/>
-              </a:rPr>
-              <a:t> </a:t>
-            </a:r>
-            <a:r>
-              <a:rPr sz="1600">
-                <a:solidFill>
-                  <a:srgbClr val="82AAFF"/>
-                </a:solidFill>
-                <a:latin typeface="Consolas"/>
-              </a:rPr>
-              <a:t>deref_mut</a:t>
-            </a:r>
-            <a:r>
-              <a:rPr sz="1600">
-                <a:solidFill>
-                  <a:srgbClr val="BAC2DE"/>
-                </a:solidFill>
-                <a:latin typeface="Consolas"/>
-              </a:rPr>
-              <a:t>(</a:t>
+              <a:t>        </a:t>
             </a:r>
             <a:r>
               <a:rPr sz="1600">
@@ -4650,124 +4507,7 @@
                 </a:solidFill>
                 <a:latin typeface="Consolas"/>
               </a:rPr>
-              <a:t>&amp;</a:t>
-            </a:r>
-            <a:r>
-              <a:rPr sz="1600">
-                <a:solidFill>
-                  <a:srgbClr val="C792EA"/>
-                </a:solidFill>
-                <a:latin typeface="Consolas"/>
-              </a:rPr>
-              <a:t>mut</a:t>
-            </a:r>
-            <a:r>
-              <a:rPr sz="1600">
-                <a:solidFill>
-                  <a:srgbClr val="EEFFFF"/>
-                </a:solidFill>
-                <a:latin typeface="Consolas"/>
-              </a:rPr>
-              <a:t> </a:t>
-            </a:r>
-            <a:r>
-              <a:rPr sz="1600">
-                <a:solidFill>
-                  <a:srgbClr val="89DDFF"/>
-                </a:solidFill>
-                <a:latin typeface="Consolas"/>
-              </a:rPr>
-              <a:t>self</a:t>
-            </a:r>
-            <a:r>
-              <a:rPr sz="1600">
-                <a:solidFill>
-                  <a:srgbClr val="BAC2DE"/>
-                </a:solidFill>
-                <a:latin typeface="Consolas"/>
-              </a:rPr>
-              <a:t>)</a:t>
-            </a:r>
-            <a:r>
-              <a:rPr sz="1600">
-                <a:solidFill>
-                  <a:srgbClr val="EEFFFF"/>
-                </a:solidFill>
-                <a:latin typeface="Consolas"/>
-              </a:rPr>
-              <a:t> </a:t>
-            </a:r>
-            <a:r>
-              <a:rPr sz="1600">
-                <a:solidFill>
-                  <a:srgbClr val="EEFFFF"/>
-                </a:solidFill>
-                <a:latin typeface="Consolas"/>
-              </a:rPr>
-              <a:t>-&gt;</a:t>
-            </a:r>
-            <a:r>
-              <a:rPr sz="1600">
-                <a:solidFill>
-                  <a:srgbClr val="EEFFFF"/>
-                </a:solidFill>
-                <a:latin typeface="Consolas"/>
-              </a:rPr>
-              <a:t> </a:t>
-            </a:r>
-            <a:r>
-              <a:rPr sz="1600">
-                <a:solidFill>
-                  <a:srgbClr val="C792EA"/>
-                </a:solidFill>
-                <a:latin typeface="Consolas"/>
-              </a:rPr>
-              <a:t>&amp;</a:t>
-            </a:r>
-            <a:r>
-              <a:rPr sz="1600">
-                <a:solidFill>
-                  <a:srgbClr val="FFCB6B"/>
-                </a:solidFill>
-                <a:latin typeface="Consolas"/>
-              </a:rPr>
-              <a:t>mut</a:t>
-            </a:r>
-            <a:r>
-              <a:rPr sz="1600">
-                <a:solidFill>
-                  <a:srgbClr val="EEFFFF"/>
-                </a:solidFill>
-                <a:latin typeface="Consolas"/>
-              </a:rPr>
-              <a:t> </a:t>
-            </a:r>
-            <a:r>
-              <a:rPr sz="1600">
-                <a:solidFill>
-                  <a:srgbClr val="89DDFF"/>
-                </a:solidFill>
-                <a:latin typeface="Consolas"/>
-              </a:rPr>
               <a:t>Self</a:t>
-            </a:r>
-            <a:r>
-              <a:rPr sz="1600">
-                <a:solidFill>
-                  <a:srgbClr val="EEFFFF"/>
-                </a:solidFill>
-                <a:latin typeface="Consolas"/>
-              </a:rPr>
-              <a:t>::</a:t>
-            </a:r>
-            <a:r>
-              <a:rPr sz="1600">
-                <a:solidFill>
-                  <a:srgbClr val="EEFFFF"/>
-                </a:solidFill>
-                <a:latin typeface="Consolas"/>
-              </a:rPr>
-              <a:t>Target</a:t>
             </a:r>
             <a:r>
               <a:rPr sz="1600">
@@ -4807,43 +4547,43 @@
                 </a:solidFill>
                 <a:latin typeface="Consolas"/>
               </a:rPr>
-              <a:t>        </a:t>
-            </a:r>
-            <a:r>
-              <a:rPr sz="1600">
-                <a:solidFill>
-                  <a:srgbClr val="89DDFF"/>
-                </a:solidFill>
-                <a:latin typeface="Consolas"/>
-              </a:rPr>
-              <a:t>&amp;</a:t>
-            </a:r>
-            <a:r>
-              <a:rPr sz="1600">
-                <a:solidFill>
-                  <a:srgbClr val="C792EA"/>
-                </a:solidFill>
-                <a:latin typeface="Consolas"/>
-              </a:rPr>
-              <a:t>mut</a:t>
-            </a:r>
-            <a:r>
-              <a:rPr sz="1600">
-                <a:solidFill>
-                  <a:srgbClr val="EEFFFF"/>
-                </a:solidFill>
-                <a:latin typeface="Consolas"/>
-              </a:rPr>
-              <a:t> </a:t>
-            </a:r>
-            <a:r>
-              <a:rPr sz="1600">
-                <a:solidFill>
-                  <a:srgbClr val="89DDFF"/>
-                </a:solidFill>
-                <a:latin typeface="Consolas"/>
-              </a:rPr>
-              <a:t>self</a:t>
+              <a:t>            </a:t>
+            </a:r>
+            <a:r>
+              <a:rPr sz="1600">
+                <a:solidFill>
+                  <a:srgbClr val="EEFFFF"/>
+                </a:solidFill>
+                <a:latin typeface="Consolas"/>
+              </a:rPr>
+              <a:t>values</a:t>
+            </a:r>
+            <a:r>
+              <a:rPr sz="1600">
+                <a:solidFill>
+                  <a:srgbClr val="BAC2DE"/>
+                </a:solidFill>
+                <a:latin typeface="Consolas"/>
+              </a:rPr>
+              <a:t>:</a:t>
+            </a:r>
+            <a:r>
+              <a:rPr sz="1600">
+                <a:solidFill>
+                  <a:srgbClr val="EEFFFF"/>
+                </a:solidFill>
+                <a:latin typeface="Consolas"/>
+              </a:rPr>
+              <a:t> </a:t>
+            </a:r>
+            <a:r>
+              <a:rPr sz="1600">
+                <a:solidFill>
+                  <a:srgbClr val="FFCB6B"/>
+                </a:solidFill>
+                <a:latin typeface="Consolas"/>
+              </a:rPr>
+              <a:t>values</a:t>
             </a:r>
             <a:r>
               <a:rPr sz="1600">
@@ -4857,11 +4597,110 @@
             <a:r>
               <a:rPr sz="1600">
                 <a:solidFill>
-                  <a:srgbClr val="F78C6C"/>
-                </a:solidFill>
-                <a:latin typeface="Consolas"/>
-              </a:rPr>
-              <a:t>0</a:t>
+                  <a:srgbClr val="EEFFFF"/>
+                </a:solidFill>
+                <a:latin typeface="Consolas"/>
+              </a:rPr>
+              <a:t>iter</a:t>
+            </a:r>
+            <a:r>
+              <a:rPr sz="1600">
+                <a:solidFill>
+                  <a:srgbClr val="BAC2DE"/>
+                </a:solidFill>
+                <a:latin typeface="Consolas"/>
+              </a:rPr>
+              <a:t>(</a:t>
+            </a:r>
+            <a:r>
+              <a:rPr sz="1600">
+                <a:solidFill>
+                  <a:srgbClr val="BAC2DE"/>
+                </a:solidFill>
+                <a:latin typeface="Consolas"/>
+              </a:rPr>
+              <a:t>)</a:t>
+            </a:r>
+            <a:r>
+              <a:rPr sz="1600">
+                <a:solidFill>
+                  <a:srgbClr val="BAC2DE"/>
+                </a:solidFill>
+                <a:latin typeface="Consolas"/>
+              </a:rPr>
+              <a:t>.</a:t>
+            </a:r>
+            <a:r>
+              <a:rPr sz="1600">
+                <a:solidFill>
+                  <a:srgbClr val="EEFFFF"/>
+                </a:solidFill>
+                <a:latin typeface="Consolas"/>
+              </a:rPr>
+              <a:t>copied</a:t>
+            </a:r>
+            <a:r>
+              <a:rPr sz="1600">
+                <a:solidFill>
+                  <a:srgbClr val="BAC2DE"/>
+                </a:solidFill>
+                <a:latin typeface="Consolas"/>
+              </a:rPr>
+              <a:t>(</a:t>
+            </a:r>
+            <a:r>
+              <a:rPr sz="1600">
+                <a:solidFill>
+                  <a:srgbClr val="BAC2DE"/>
+                </a:solidFill>
+                <a:latin typeface="Consolas"/>
+              </a:rPr>
+              <a:t>)</a:t>
+            </a:r>
+            <a:r>
+              <a:rPr sz="1600">
+                <a:solidFill>
+                  <a:srgbClr val="BAC2DE"/>
+                </a:solidFill>
+                <a:latin typeface="Consolas"/>
+              </a:rPr>
+              <a:t>.</a:t>
+            </a:r>
+            <a:r>
+              <a:rPr sz="1600">
+                <a:solidFill>
+                  <a:srgbClr val="EEFFFF"/>
+                </a:solidFill>
+                <a:latin typeface="Consolas"/>
+              </a:rPr>
+              <a:t>collect</a:t>
+            </a:r>
+            <a:r>
+              <a:rPr sz="1600">
+                <a:solidFill>
+                  <a:srgbClr val="BAC2DE"/>
+                </a:solidFill>
+                <a:latin typeface="Consolas"/>
+              </a:rPr>
+              <a:t>(</a:t>
+            </a:r>
+            <a:r>
+              <a:rPr sz="1600">
+                <a:solidFill>
+                  <a:srgbClr val="BAC2DE"/>
+                </a:solidFill>
+                <a:latin typeface="Consolas"/>
+              </a:rPr>
+              <a:t>)</a:t>
+            </a:r>
+            <a:r>
+              <a:rPr sz="1600">
+                <a:solidFill>
+                  <a:srgbClr val="BAC2DE"/>
+                </a:solidFill>
+                <a:latin typeface="Consolas"/>
+              </a:rPr>
+              <a:t>,</a:t>
             </a:r>
           </a:p>
           <a:p>
@@ -4883,7 +4722,7 @@
                 </a:solidFill>
                 <a:latin typeface="Consolas"/>
               </a:rPr>
-              <a:t>    </a:t>
+              <a:t>        </a:t>
             </a:r>
             <a:r>
               <a:rPr sz="1600">
@@ -4910,6 +4749,15 @@
             <a:r>
               <a:rPr sz="1600">
                 <a:solidFill>
+                  <a:srgbClr val="EEFFFF"/>
+                </a:solidFill>
+                <a:latin typeface="Consolas"/>
+              </a:rPr>
+              <a:t>    </a:t>
+            </a:r>
+            <a:r>
+              <a:rPr sz="1600">
+                <a:solidFill>
                   <a:srgbClr val="BAC2DE"/>
                 </a:solidFill>
                 <a:latin typeface="Consolas"/>
@@ -4945,11 +4793,20 @@
             <a:r>
               <a:rPr sz="1600">
                 <a:solidFill>
+                  <a:srgbClr val="EEFFFF"/>
+                </a:solidFill>
+                <a:latin typeface="Consolas"/>
+              </a:rPr>
+              <a:t>    </a:t>
+            </a:r>
+            <a:r>
+              <a:rPr sz="1600">
+                <a:solidFill>
                   <a:srgbClr val="6A9955"/>
                 </a:solidFill>
                 <a:latin typeface="Consolas"/>
               </a:rPr>
-              <a:t>// TECHNIQUE NAME: deref lookup.</a:t>
+              <a:t>// Return a new set that is the union of two borrowed sets.</a:t>
             </a:r>
           </a:p>
         </p:txBody>
@@ -5048,6 +4905,195 @@
                 <a:spcPts val="0"/>
               </a:spcAft>
             </a:pPr>
+            <a:r>
+              <a:rPr sz="1600">
+                <a:solidFill>
+                  <a:srgbClr val="EEFFFF"/>
+                </a:solidFill>
+                <a:latin typeface="Consolas"/>
+              </a:rPr>
+              <a:t>    </a:t>
+            </a:r>
+            <a:r>
+              <a:rPr sz="1600">
+                <a:solidFill>
+                  <a:srgbClr val="C792EA"/>
+                </a:solidFill>
+                <a:latin typeface="Consolas"/>
+              </a:rPr>
+              <a:t>fn</a:t>
+            </a:r>
+            <a:r>
+              <a:rPr sz="1600">
+                <a:solidFill>
+                  <a:srgbClr val="EEFFFF"/>
+                </a:solidFill>
+                <a:latin typeface="Consolas"/>
+              </a:rPr>
+              <a:t> </a:t>
+            </a:r>
+            <a:r>
+              <a:rPr sz="1600">
+                <a:solidFill>
+                  <a:srgbClr val="82AAFF"/>
+                </a:solidFill>
+                <a:latin typeface="Consolas"/>
+              </a:rPr>
+              <a:t>union</a:t>
+            </a:r>
+            <a:r>
+              <a:rPr sz="1600">
+                <a:solidFill>
+                  <a:srgbClr val="BAC2DE"/>
+                </a:solidFill>
+                <a:latin typeface="Consolas"/>
+              </a:rPr>
+              <a:t>(</a:t>
+            </a:r>
+            <a:r>
+              <a:rPr sz="1600">
+                <a:solidFill>
+                  <a:srgbClr val="89DDFF"/>
+                </a:solidFill>
+                <a:latin typeface="Consolas"/>
+              </a:rPr>
+              <a:t>&amp;</a:t>
+            </a:r>
+            <a:r>
+              <a:rPr sz="1600">
+                <a:solidFill>
+                  <a:srgbClr val="89DDFF"/>
+                </a:solidFill>
+                <a:latin typeface="Consolas"/>
+              </a:rPr>
+              <a:t>self</a:t>
+            </a:r>
+            <a:r>
+              <a:rPr sz="1600">
+                <a:solidFill>
+                  <a:srgbClr val="BAC2DE"/>
+                </a:solidFill>
+                <a:latin typeface="Consolas"/>
+              </a:rPr>
+              <a:t>,</a:t>
+            </a:r>
+            <a:r>
+              <a:rPr sz="1600">
+                <a:solidFill>
+                  <a:srgbClr val="EEFFFF"/>
+                </a:solidFill>
+                <a:latin typeface="Consolas"/>
+              </a:rPr>
+              <a:t> </a:t>
+            </a:r>
+            <a:r>
+              <a:rPr sz="1600">
+                <a:solidFill>
+                  <a:srgbClr val="EEFFFF"/>
+                </a:solidFill>
+                <a:latin typeface="Consolas"/>
+              </a:rPr>
+              <a:t>other</a:t>
+            </a:r>
+            <a:r>
+              <a:rPr sz="1600">
+                <a:solidFill>
+                  <a:srgbClr val="BAC2DE"/>
+                </a:solidFill>
+                <a:latin typeface="Consolas"/>
+              </a:rPr>
+              <a:t>:</a:t>
+            </a:r>
+            <a:r>
+              <a:rPr sz="1600">
+                <a:solidFill>
+                  <a:srgbClr val="EEFFFF"/>
+                </a:solidFill>
+                <a:latin typeface="Consolas"/>
+              </a:rPr>
+              <a:t> </a:t>
+            </a:r>
+            <a:r>
+              <a:rPr sz="1600">
+                <a:solidFill>
+                  <a:srgbClr val="C792EA"/>
+                </a:solidFill>
+                <a:latin typeface="Consolas"/>
+              </a:rPr>
+              <a:t>&amp;</a:t>
+            </a:r>
+            <a:r>
+              <a:rPr sz="1600">
+                <a:solidFill>
+                  <a:srgbClr val="FFCB6B"/>
+                </a:solidFill>
+                <a:latin typeface="Consolas"/>
+              </a:rPr>
+              <a:t>Self</a:t>
+            </a:r>
+            <a:r>
+              <a:rPr sz="1600">
+                <a:solidFill>
+                  <a:srgbClr val="BAC2DE"/>
+                </a:solidFill>
+                <a:latin typeface="Consolas"/>
+              </a:rPr>
+              <a:t>)</a:t>
+            </a:r>
+            <a:r>
+              <a:rPr sz="1600">
+                <a:solidFill>
+                  <a:srgbClr val="EEFFFF"/>
+                </a:solidFill>
+                <a:latin typeface="Consolas"/>
+              </a:rPr>
+              <a:t> </a:t>
+            </a:r>
+            <a:r>
+              <a:rPr sz="1600">
+                <a:solidFill>
+                  <a:srgbClr val="BAC2DE"/>
+                </a:solidFill>
+                <a:latin typeface="Consolas"/>
+              </a:rPr>
+              <a:t>-&gt;</a:t>
+            </a:r>
+            <a:r>
+              <a:rPr sz="1600">
+                <a:solidFill>
+                  <a:srgbClr val="EEFFFF"/>
+                </a:solidFill>
+                <a:latin typeface="Consolas"/>
+              </a:rPr>
+              <a:t> </a:t>
+            </a:r>
+            <a:r>
+              <a:rPr sz="1600">
+                <a:solidFill>
+                  <a:srgbClr val="FFCB6B"/>
+                </a:solidFill>
+                <a:latin typeface="Consolas"/>
+              </a:rPr>
+              <a:t>Self</a:t>
+            </a:r>
+            <a:r>
+              <a:rPr sz="1600">
+                <a:solidFill>
+                  <a:srgbClr val="EEFFFF"/>
+                </a:solidFill>
+                <a:latin typeface="Consolas"/>
+              </a:rPr>
+              <a:t> </a:t>
+            </a:r>
+            <a:r>
+              <a:rPr sz="1600">
+                <a:solidFill>
+                  <a:srgbClr val="BAC2DE"/>
+                </a:solidFill>
+                <a:latin typeface="Consolas"/>
+              </a:rPr>
+              <a:t>{</a:t>
+            </a:r>
           </a:p>
           <a:p>
             <a:pPr>
@@ -5064,47 +5110,20 @@
             <a:r>
               <a:rPr sz="1600">
                 <a:solidFill>
-                  <a:srgbClr val="C792EA"/>
-                </a:solidFill>
-                <a:latin typeface="Consolas"/>
-              </a:rPr>
-              <a:t>fn</a:t>
-            </a:r>
-            <a:r>
-              <a:rPr sz="1600">
-                <a:solidFill>
-                  <a:srgbClr val="EEFFFF"/>
-                </a:solidFill>
-                <a:latin typeface="Consolas"/>
-              </a:rPr>
-              <a:t> </a:t>
-            </a:r>
-            <a:r>
-              <a:rPr sz="1600">
-                <a:solidFill>
-                  <a:srgbClr val="82AAFF"/>
-                </a:solidFill>
-                <a:latin typeface="Consolas"/>
-              </a:rPr>
-              <a:t>main</a:t>
-            </a:r>
-            <a:r>
-              <a:rPr sz="1600">
-                <a:solidFill>
-                  <a:srgbClr val="BAC2DE"/>
-                </a:solidFill>
-                <a:latin typeface="Consolas"/>
-              </a:rPr>
-              <a:t>(</a:t>
-            </a:r>
-            <a:r>
-              <a:rPr sz="1600">
-                <a:solidFill>
-                  <a:srgbClr val="BAC2DE"/>
-                </a:solidFill>
-                <a:latin typeface="Consolas"/>
-              </a:rPr>
-              <a:t>)</a:t>
+                  <a:srgbClr val="EEFFFF"/>
+                </a:solidFill>
+                <a:latin typeface="Consolas"/>
+              </a:rPr>
+              <a:t>        </a:t>
+            </a:r>
+            <a:r>
+              <a:rPr sz="1600">
+                <a:solidFill>
+                  <a:srgbClr val="89DDFF"/>
+                </a:solidFill>
+                <a:latin typeface="Consolas"/>
+              </a:rPr>
+              <a:t>Self</a:t>
             </a:r>
             <a:r>
               <a:rPr sz="1600">
@@ -5144,7 +5163,70 @@
                 </a:solidFill>
                 <a:latin typeface="Consolas"/>
               </a:rPr>
-              <a:t>    </a:t>
+              <a:t>            </a:t>
+            </a:r>
+            <a:r>
+              <a:rPr sz="1600">
+                <a:solidFill>
+                  <a:srgbClr val="EEFFFF"/>
+                </a:solidFill>
+                <a:latin typeface="Consolas"/>
+              </a:rPr>
+              <a:t>values</a:t>
+            </a:r>
+            <a:r>
+              <a:rPr sz="1600">
+                <a:solidFill>
+                  <a:srgbClr val="BAC2DE"/>
+                </a:solidFill>
+                <a:latin typeface="Consolas"/>
+              </a:rPr>
+              <a:t>:</a:t>
+            </a:r>
+            <a:r>
+              <a:rPr sz="1600">
+                <a:solidFill>
+                  <a:srgbClr val="EEFFFF"/>
+                </a:solidFill>
+                <a:latin typeface="Consolas"/>
+              </a:rPr>
+              <a:t> </a:t>
+            </a:r>
+            <a:r>
+              <a:rPr sz="1600">
+                <a:solidFill>
+                  <a:srgbClr val="FFCB6B"/>
+                </a:solidFill>
+                <a:latin typeface="Consolas"/>
+              </a:rPr>
+              <a:t>self</a:t>
+            </a:r>
+            <a:r>
+              <a:rPr sz="1600">
+                <a:solidFill>
+                  <a:srgbClr val="BAC2DE"/>
+                </a:solidFill>
+                <a:latin typeface="Consolas"/>
+              </a:rPr>
+              <a:t>.</a:t>
+            </a:r>
+            <a:r>
+              <a:rPr sz="1600">
+                <a:solidFill>
+                  <a:srgbClr val="EEFFFF"/>
+                </a:solidFill>
+                <a:latin typeface="Consolas"/>
+              </a:rPr>
+              <a:t>values</a:t>
+            </a:r>
+            <a:r>
+              <a:rPr sz="1600">
+                <a:solidFill>
+                  <a:srgbClr val="BAC2DE"/>
+                </a:solidFill>
+                <a:latin typeface="Consolas"/>
+              </a:rPr>
+              <a:t>.</a:t>
             </a:r>
             <a:r>
               <a:rPr sz="1600">
@@ -5153,52 +5235,16 @@
                 </a:solidFill>
                 <a:latin typeface="Consolas"/>
               </a:rPr>
-              <a:t>let</a:t>
-            </a:r>
-            <a:r>
-              <a:rPr sz="1600">
-                <a:solidFill>
-                  <a:srgbClr val="EEFFFF"/>
-                </a:solidFill>
-                <a:latin typeface="Consolas"/>
-              </a:rPr>
-              <a:t> </a:t>
-            </a:r>
-            <a:r>
-              <a:rPr sz="1600">
-                <a:solidFill>
-                  <a:srgbClr val="C792EA"/>
-                </a:solidFill>
-                <a:latin typeface="Consolas"/>
-              </a:rPr>
-              <a:t>mut</a:t>
-            </a:r>
-            <a:r>
-              <a:rPr sz="1600">
-                <a:solidFill>
-                  <a:srgbClr val="EEFFFF"/>
-                </a:solidFill>
-                <a:latin typeface="Consolas"/>
-              </a:rPr>
-              <a:t> </a:t>
-            </a:r>
-            <a:r>
-              <a:rPr sz="1600">
-                <a:solidFill>
-                  <a:srgbClr val="EEFFFF"/>
-                </a:solidFill>
-                <a:latin typeface="Consolas"/>
-              </a:rPr>
-              <a:t>page</a:t>
-            </a:r>
-            <a:r>
-              <a:rPr sz="1600">
-                <a:solidFill>
-                  <a:srgbClr val="EEFFFF"/>
-                </a:solidFill>
-                <a:latin typeface="Consolas"/>
-              </a:rPr>
-              <a:t> </a:t>
+              <a:t>union</a:t>
+            </a:r>
+            <a:r>
+              <a:rPr sz="1600">
+                <a:solidFill>
+                  <a:srgbClr val="BAC2DE"/>
+                </a:solidFill>
+                <a:latin typeface="Consolas"/>
+              </a:rPr>
+              <a:t>(</a:t>
             </a:r>
             <a:r>
               <a:rPr sz="1600">
@@ -5207,43 +5253,61 @@
                 </a:solidFill>
                 <a:latin typeface="Consolas"/>
               </a:rPr>
-              <a:t>=</a:t>
-            </a:r>
-            <a:r>
-              <a:rPr sz="1600">
-                <a:solidFill>
-                  <a:srgbClr val="EEFFFF"/>
-                </a:solidFill>
-                <a:latin typeface="Consolas"/>
-              </a:rPr>
-              <a:t> </a:t>
-            </a:r>
-            <a:r>
-              <a:rPr sz="1600">
-                <a:solidFill>
-                  <a:srgbClr val="EEFFFF"/>
-                </a:solidFill>
-                <a:latin typeface="Consolas"/>
-              </a:rPr>
-              <a:t>HtmlBuffer</a:t>
-            </a:r>
-            <a:r>
-              <a:rPr sz="1600">
-                <a:solidFill>
-                  <a:srgbClr val="EEFFFF"/>
-                </a:solidFill>
-                <a:latin typeface="Consolas"/>
-              </a:rPr>
-              <a:t>::</a:t>
-            </a:r>
-            <a:r>
-              <a:rPr sz="1600">
-                <a:solidFill>
-                  <a:srgbClr val="EEFFFF"/>
-                </a:solidFill>
-                <a:latin typeface="Consolas"/>
-              </a:rPr>
-              <a:t>new</a:t>
+              <a:t>&amp;</a:t>
+            </a:r>
+            <a:r>
+              <a:rPr sz="1600">
+                <a:solidFill>
+                  <a:srgbClr val="EEFFFF"/>
+                </a:solidFill>
+                <a:latin typeface="Consolas"/>
+              </a:rPr>
+              <a:t>other</a:t>
+            </a:r>
+            <a:r>
+              <a:rPr sz="1600">
+                <a:solidFill>
+                  <a:srgbClr val="BAC2DE"/>
+                </a:solidFill>
+                <a:latin typeface="Consolas"/>
+              </a:rPr>
+              <a:t>.</a:t>
+            </a:r>
+            <a:r>
+              <a:rPr sz="1600">
+                <a:solidFill>
+                  <a:srgbClr val="EEFFFF"/>
+                </a:solidFill>
+                <a:latin typeface="Consolas"/>
+              </a:rPr>
+              <a:t>values</a:t>
+            </a:r>
+            <a:r>
+              <a:rPr sz="1600">
+                <a:solidFill>
+                  <a:srgbClr val="BAC2DE"/>
+                </a:solidFill>
+                <a:latin typeface="Consolas"/>
+              </a:rPr>
+              <a:t>)</a:t>
+            </a:r>
+            <a:r>
+              <a:rPr sz="1600">
+                <a:solidFill>
+                  <a:srgbClr val="BAC2DE"/>
+                </a:solidFill>
+                <a:latin typeface="Consolas"/>
+              </a:rPr>
+              <a:t>.</a:t>
+            </a:r>
+            <a:r>
+              <a:rPr sz="1600">
+                <a:solidFill>
+                  <a:srgbClr val="EEFFFF"/>
+                </a:solidFill>
+                <a:latin typeface="Consolas"/>
+              </a:rPr>
+              <a:t>copied</a:t>
             </a:r>
             <a:r>
               <a:rPr sz="1600">
@@ -5270,7 +5334,43 @@
                 </a:solidFill>
                 <a:latin typeface="Consolas"/>
               </a:rPr>
-              <a:t>;</a:t>
+              <a:t>.</a:t>
+            </a:r>
+            <a:r>
+              <a:rPr sz="1600">
+                <a:solidFill>
+                  <a:srgbClr val="EEFFFF"/>
+                </a:solidFill>
+                <a:latin typeface="Consolas"/>
+              </a:rPr>
+              <a:t>collect</a:t>
+            </a:r>
+            <a:r>
+              <a:rPr sz="1600">
+                <a:solidFill>
+                  <a:srgbClr val="BAC2DE"/>
+                </a:solidFill>
+                <a:latin typeface="Consolas"/>
+              </a:rPr>
+              <a:t>(</a:t>
+            </a:r>
+            <a:r>
+              <a:rPr sz="1600">
+                <a:solidFill>
+                  <a:srgbClr val="BAC2DE"/>
+                </a:solidFill>
+                <a:latin typeface="Consolas"/>
+              </a:rPr>
+              <a:t>)</a:t>
+            </a:r>
+            <a:r>
+              <a:rPr sz="1600">
+                <a:solidFill>
+                  <a:srgbClr val="BAC2DE"/>
+                </a:solidFill>
+                <a:latin typeface="Consolas"/>
+              </a:rPr>
+              <a:t>,</a:t>
             </a:r>
           </a:p>
           <a:p>
@@ -5285,6 +5385,24 @@
                 <a:spcPts val="0"/>
               </a:spcAft>
             </a:pPr>
+            <a:r>
+              <a:rPr sz="1600">
+                <a:solidFill>
+                  <a:srgbClr val="EEFFFF"/>
+                </a:solidFill>
+                <a:latin typeface="Consolas"/>
+              </a:rPr>
+              <a:t>        </a:t>
+            </a:r>
+            <a:r>
+              <a:rPr sz="1600">
+                <a:solidFill>
+                  <a:srgbClr val="BAC2DE"/>
+                </a:solidFill>
+                <a:latin typeface="Consolas"/>
+              </a:rPr>
+              <a:t>}</a:t>
+            </a:r>
           </a:p>
           <a:p>
             <a:pPr>
@@ -5310,11 +5428,11 @@
             <a:r>
               <a:rPr sz="1600">
                 <a:solidFill>
-                  <a:srgbClr val="6A9955"/>
-                </a:solidFill>
-                <a:latin typeface="Consolas"/>
-              </a:rPr>
-              <a:t>// `push_str` and `len` are String methods found via deref lookup.</a:t>
+                  <a:srgbClr val="BAC2DE"/>
+                </a:solidFill>
+                <a:latin typeface="Consolas"/>
+              </a:rPr>
+              <a:t>}</a:t>
             </a:r>
           </a:p>
           <a:p>
@@ -5329,96 +5447,6 @@
                 <a:spcPts val="0"/>
               </a:spcAft>
             </a:pPr>
-            <a:r>
-              <a:rPr sz="1600">
-                <a:solidFill>
-                  <a:srgbClr val="EEFFFF"/>
-                </a:solidFill>
-                <a:latin typeface="Consolas"/>
-              </a:rPr>
-              <a:t>    </a:t>
-            </a:r>
-            <a:r>
-              <a:rPr sz="1600">
-                <a:solidFill>
-                  <a:srgbClr val="EEFFFF"/>
-                </a:solidFill>
-                <a:latin typeface="Consolas"/>
-              </a:rPr>
-              <a:t>page</a:t>
-            </a:r>
-            <a:r>
-              <a:rPr sz="1600">
-                <a:solidFill>
-                  <a:srgbClr val="BAC2DE"/>
-                </a:solidFill>
-                <a:latin typeface="Consolas"/>
-              </a:rPr>
-              <a:t>.</a:t>
-            </a:r>
-            <a:r>
-              <a:rPr sz="1600">
-                <a:solidFill>
-                  <a:srgbClr val="EEFFFF"/>
-                </a:solidFill>
-                <a:latin typeface="Consolas"/>
-              </a:rPr>
-              <a:t>push_str</a:t>
-            </a:r>
-            <a:r>
-              <a:rPr sz="1600">
-                <a:solidFill>
-                  <a:srgbClr val="BAC2DE"/>
-                </a:solidFill>
-                <a:latin typeface="Consolas"/>
-              </a:rPr>
-              <a:t>(</a:t>
-            </a:r>
-            <a:r>
-              <a:rPr sz="1600">
-                <a:solidFill>
-                  <a:srgbClr val="C3E88D"/>
-                </a:solidFill>
-                <a:latin typeface="Consolas"/>
-              </a:rPr>
-              <a:t>"</a:t>
-            </a:r>
-            <a:r>
-              <a:rPr sz="1600">
-                <a:solidFill>
-                  <a:srgbClr val="C3E88D"/>
-                </a:solidFill>
-                <a:latin typeface="Consolas"/>
-              </a:rPr>
-              <a:t>&lt;h1&gt;Hello&lt;/h1&gt;</a:t>
-            </a:r>
-            <a:r>
-              <a:rPr sz="1600">
-                <a:solidFill>
-                  <a:srgbClr val="C3E88D"/>
-                </a:solidFill>
-                <a:latin typeface="Consolas"/>
-              </a:rPr>
-              <a:t>"</a:t>
-            </a:r>
-            <a:r>
-              <a:rPr sz="1600">
-                <a:solidFill>
-                  <a:srgbClr val="BAC2DE"/>
-                </a:solidFill>
-                <a:latin typeface="Consolas"/>
-              </a:rPr>
-              <a:t>)</a:t>
-            </a:r>
-            <a:r>
-              <a:rPr sz="1600">
-                <a:solidFill>
-                  <a:srgbClr val="BAC2DE"/>
-                </a:solidFill>
-                <a:latin typeface="Consolas"/>
-              </a:rPr>
-              <a:t>;</a:t>
-            </a:r>
           </a:p>
           <a:p>
             <a:pPr>
@@ -5444,29 +5472,29 @@
             <a:r>
               <a:rPr sz="1600">
                 <a:solidFill>
-                  <a:srgbClr val="EEFFFF"/>
-                </a:solidFill>
-                <a:latin typeface="Consolas"/>
-              </a:rPr>
-              <a:t>page</a:t>
-            </a:r>
-            <a:r>
-              <a:rPr sz="1600">
-                <a:solidFill>
-                  <a:srgbClr val="BAC2DE"/>
-                </a:solidFill>
-                <a:latin typeface="Consolas"/>
-              </a:rPr>
-              <a:t>.</a:t>
-            </a:r>
-            <a:r>
-              <a:rPr sz="1600">
-                <a:solidFill>
-                  <a:srgbClr val="EEFFFF"/>
-                </a:solidFill>
-                <a:latin typeface="Consolas"/>
-              </a:rPr>
-              <a:t>push_str</a:t>
+                  <a:srgbClr val="C792EA"/>
+                </a:solidFill>
+                <a:latin typeface="Consolas"/>
+              </a:rPr>
+              <a:t>fn</a:t>
+            </a:r>
+            <a:r>
+              <a:rPr sz="1600">
+                <a:solidFill>
+                  <a:srgbClr val="EEFFFF"/>
+                </a:solidFill>
+                <a:latin typeface="Consolas"/>
+              </a:rPr>
+              <a:t> </a:t>
+            </a:r>
+            <a:r>
+              <a:rPr sz="1600">
+                <a:solidFill>
+                  <a:srgbClr val="82AAFF"/>
+                </a:solidFill>
+                <a:latin typeface="Consolas"/>
+              </a:rPr>
+              <a:t>is_empty</a:t>
             </a:r>
             <a:r>
               <a:rPr sz="1600">
@@ -5480,29 +5508,20 @@
             <a:r>
               <a:rPr sz="1600">
                 <a:solidFill>
-                  <a:srgbClr val="C3E88D"/>
-                </a:solidFill>
-                <a:latin typeface="Consolas"/>
-              </a:rPr>
-              <a:t>"</a:t>
-            </a:r>
-            <a:r>
-              <a:rPr sz="1600">
-                <a:solidFill>
-                  <a:srgbClr val="C3E88D"/>
-                </a:solidFill>
-                <a:latin typeface="Consolas"/>
-              </a:rPr>
-              <a:t>&lt;p&gt;Rust&lt;/p&gt;</a:t>
-            </a:r>
-            <a:r>
-              <a:rPr sz="1600">
-                <a:solidFill>
-                  <a:srgbClr val="C3E88D"/>
-                </a:solidFill>
-                <a:latin typeface="Consolas"/>
-              </a:rPr>
-              <a:t>"</a:t>
+                  <a:srgbClr val="89DDFF"/>
+                </a:solidFill>
+                <a:latin typeface="Consolas"/>
+              </a:rPr>
+              <a:t>&amp;</a:t>
+            </a:r>
+            <a:r>
+              <a:rPr sz="1600">
+                <a:solidFill>
+                  <a:srgbClr val="89DDFF"/>
+                </a:solidFill>
+                <a:latin typeface="Consolas"/>
+              </a:rPr>
+              <a:t>self</a:t>
             </a:r>
             <a:r>
               <a:rPr sz="1600">
@@ -5516,11 +5535,56 @@
             <a:r>
               <a:rPr sz="1600">
                 <a:solidFill>
-                  <a:srgbClr val="BAC2DE"/>
-                </a:solidFill>
-                <a:latin typeface="Consolas"/>
-              </a:rPr>
-              <a:t>;</a:t>
+                  <a:srgbClr val="EEFFFF"/>
+                </a:solidFill>
+                <a:latin typeface="Consolas"/>
+              </a:rPr>
+              <a:t> </a:t>
+            </a:r>
+            <a:r>
+              <a:rPr sz="1600">
+                <a:solidFill>
+                  <a:srgbClr val="BAC2DE"/>
+                </a:solidFill>
+                <a:latin typeface="Consolas"/>
+              </a:rPr>
+              <a:t>-&gt;</a:t>
+            </a:r>
+            <a:r>
+              <a:rPr sz="1600">
+                <a:solidFill>
+                  <a:srgbClr val="EEFFFF"/>
+                </a:solidFill>
+                <a:latin typeface="Consolas"/>
+              </a:rPr>
+              <a:t> </a:t>
+            </a:r>
+            <a:r>
+              <a:rPr sz="1600">
+                <a:solidFill>
+                  <a:srgbClr val="C792EA"/>
+                </a:solidFill>
+                <a:latin typeface="Consolas"/>
+              </a:rPr>
+              <a:t>bool</a:t>
+            </a:r>
+            <a:r>
+              <a:rPr sz="1600">
+                <a:solidFill>
+                  <a:srgbClr val="EEFFFF"/>
+                </a:solidFill>
+                <a:latin typeface="Consolas"/>
+              </a:rPr>
+              <a:t> </a:t>
+            </a:r>
+            <a:r>
+              <a:rPr sz="1600">
+                <a:solidFill>
+                  <a:srgbClr val="BAC2DE"/>
+                </a:solidFill>
+                <a:latin typeface="Consolas"/>
+              </a:rPr>
+              <a:t>{</a:t>
             </a:r>
           </a:p>
           <a:p>
@@ -5535,6 +5599,78 @@
                 <a:spcPts val="0"/>
               </a:spcAft>
             </a:pPr>
+            <a:r>
+              <a:rPr sz="1600">
+                <a:solidFill>
+                  <a:srgbClr val="EEFFFF"/>
+                </a:solidFill>
+                <a:latin typeface="Consolas"/>
+              </a:rPr>
+              <a:t>        </a:t>
+            </a:r>
+            <a:r>
+              <a:rPr sz="1600">
+                <a:solidFill>
+                  <a:srgbClr val="89DDFF"/>
+                </a:solidFill>
+                <a:latin typeface="Consolas"/>
+              </a:rPr>
+              <a:t>self</a:t>
+            </a:r>
+            <a:r>
+              <a:rPr sz="1600">
+                <a:solidFill>
+                  <a:srgbClr val="BAC2DE"/>
+                </a:solidFill>
+                <a:latin typeface="Consolas"/>
+              </a:rPr>
+              <a:t>.</a:t>
+            </a:r>
+            <a:r>
+              <a:rPr sz="1600">
+                <a:solidFill>
+                  <a:srgbClr val="EEFFFF"/>
+                </a:solidFill>
+                <a:latin typeface="Consolas"/>
+              </a:rPr>
+              <a:t>values</a:t>
+            </a:r>
+            <a:r>
+              <a:rPr sz="1600">
+                <a:solidFill>
+                  <a:srgbClr val="BAC2DE"/>
+                </a:solidFill>
+                <a:latin typeface="Consolas"/>
+              </a:rPr>
+              <a:t>.</a:t>
+            </a:r>
+            <a:r>
+              <a:rPr sz="1600">
+                <a:solidFill>
+                  <a:srgbClr val="EEFFFF"/>
+                </a:solidFill>
+                <a:latin typeface="Consolas"/>
+              </a:rPr>
+              <a:t>is_empty</a:t>
+            </a:r>
+            <a:r>
+              <a:rPr sz="1600">
+                <a:solidFill>
+                  <a:srgbClr val="BAC2DE"/>
+                </a:solidFill>
+                <a:latin typeface="Consolas"/>
+              </a:rPr>
+              <a:t>(</a:t>
+            </a:r>
+            <a:r>
+              <a:rPr sz="1600">
+                <a:solidFill>
+                  <a:srgbClr val="BAC2DE"/>
+                </a:solidFill>
+                <a:latin typeface="Consolas"/>
+              </a:rPr>
+              <a:t>)</a:t>
+            </a:r>
           </a:p>
           <a:p>
             <a:pPr>
@@ -5560,110 +5696,11 @@
             <a:r>
               <a:rPr sz="1600">
                 <a:solidFill>
-                  <a:srgbClr val="82AAFF"/>
-                </a:solidFill>
-                <a:latin typeface="Consolas"/>
-              </a:rPr>
-              <a:t>assert_eq!</a:t>
-            </a:r>
-            <a:r>
-              <a:rPr sz="1600">
-                <a:solidFill>
-                  <a:srgbClr val="BAC2DE"/>
-                </a:solidFill>
-                <a:latin typeface="Consolas"/>
-              </a:rPr>
-              <a:t>(</a:t>
-            </a:r>
-            <a:r>
-              <a:rPr sz="1600">
-                <a:solidFill>
-                  <a:srgbClr val="EEFFFF"/>
-                </a:solidFill>
-                <a:latin typeface="Consolas"/>
-              </a:rPr>
-              <a:t>page</a:t>
-            </a:r>
-            <a:r>
-              <a:rPr sz="1600">
-                <a:solidFill>
-                  <a:srgbClr val="BAC2DE"/>
-                </a:solidFill>
-                <a:latin typeface="Consolas"/>
-              </a:rPr>
-              <a:t>.</a:t>
-            </a:r>
-            <a:r>
-              <a:rPr sz="1600">
-                <a:solidFill>
-                  <a:srgbClr val="EEFFFF"/>
-                </a:solidFill>
-                <a:latin typeface="Consolas"/>
-              </a:rPr>
-              <a:t>len</a:t>
-            </a:r>
-            <a:r>
-              <a:rPr sz="1600">
-                <a:solidFill>
-                  <a:srgbClr val="BAC2DE"/>
-                </a:solidFill>
-                <a:latin typeface="Consolas"/>
-              </a:rPr>
-              <a:t>(</a:t>
-            </a:r>
-            <a:r>
-              <a:rPr sz="1600">
-                <a:solidFill>
-                  <a:srgbClr val="BAC2DE"/>
-                </a:solidFill>
-                <a:latin typeface="Consolas"/>
-              </a:rPr>
-              <a:t>)</a:t>
-            </a:r>
-            <a:r>
-              <a:rPr sz="1600">
-                <a:solidFill>
-                  <a:srgbClr val="BAC2DE"/>
-                </a:solidFill>
-                <a:latin typeface="Consolas"/>
-              </a:rPr>
-              <a:t>,</a:t>
-            </a:r>
-            <a:r>
-              <a:rPr sz="1600">
-                <a:solidFill>
-                  <a:srgbClr val="EEFFFF"/>
-                </a:solidFill>
-                <a:latin typeface="Consolas"/>
-              </a:rPr>
-              <a:t> </a:t>
-            </a:r>
-            <a:r>
-              <a:rPr sz="1600">
-                <a:solidFill>
-                  <a:srgbClr val="F78C6C"/>
-                </a:solidFill>
-                <a:latin typeface="Consolas"/>
-              </a:rPr>
-              <a:t>25</a:t>
-            </a:r>
-            <a:r>
-              <a:rPr sz="1600">
-                <a:solidFill>
-                  <a:srgbClr val="BAC2DE"/>
-                </a:solidFill>
-                <a:latin typeface="Consolas"/>
-              </a:rPr>
-              <a:t>)</a:t>
-            </a:r>
-            <a:r>
-              <a:rPr sz="1600">
-                <a:solidFill>
-                  <a:srgbClr val="BAC2DE"/>
-                </a:solidFill>
-                <a:latin typeface="Consolas"/>
-              </a:rPr>
-              <a:t>;</a:t>
+                  <a:srgbClr val="BAC2DE"/>
+                </a:solidFill>
+                <a:latin typeface="Consolas"/>
+              </a:rPr>
+              <a:t>}</a:t>
             </a:r>
           </a:p>
           <a:p>
@@ -5681,20 +5718,11 @@
             <a:r>
               <a:rPr sz="1600">
                 <a:solidFill>
-                  <a:srgbClr val="EEFFFF"/>
-                </a:solidFill>
-                <a:latin typeface="Consolas"/>
-              </a:rPr>
-              <a:t>    </a:t>
-            </a:r>
-            <a:r>
-              <a:rPr sz="1600">
-                <a:solidFill>
-                  <a:srgbClr val="6A9955"/>
-                </a:solidFill>
-                <a:latin typeface="Consolas"/>
-              </a:rPr>
-              <a:t>// Borrow the thing `page` points to and compare.</a:t>
+                  <a:srgbClr val="BAC2DE"/>
+                </a:solidFill>
+                <a:latin typeface="Consolas"/>
+              </a:rPr>
+              <a:t>}</a:t>
             </a:r>
           </a:p>
           <a:p>
@@ -5709,123 +5737,6 @@
                 <a:spcPts val="0"/>
               </a:spcAft>
             </a:pPr>
-            <a:r>
-              <a:rPr sz="1600">
-                <a:solidFill>
-                  <a:srgbClr val="EEFFFF"/>
-                </a:solidFill>
-                <a:latin typeface="Consolas"/>
-              </a:rPr>
-              <a:t>    </a:t>
-            </a:r>
-            <a:r>
-              <a:rPr sz="1600">
-                <a:solidFill>
-                  <a:srgbClr val="82AAFF"/>
-                </a:solidFill>
-                <a:latin typeface="Consolas"/>
-              </a:rPr>
-              <a:t>assert_eq!</a:t>
-            </a:r>
-            <a:r>
-              <a:rPr sz="1600">
-                <a:solidFill>
-                  <a:srgbClr val="BAC2DE"/>
-                </a:solidFill>
-                <a:latin typeface="Consolas"/>
-              </a:rPr>
-              <a:t>(</a:t>
-            </a:r>
-            <a:r>
-              <a:rPr sz="1600">
-                <a:solidFill>
-                  <a:srgbClr val="89DDFF"/>
-                </a:solidFill>
-                <a:latin typeface="Consolas"/>
-              </a:rPr>
-              <a:t>&amp;</a:t>
-            </a:r>
-            <a:r>
-              <a:rPr sz="1600">
-                <a:solidFill>
-                  <a:srgbClr val="89DDFF"/>
-                </a:solidFill>
-                <a:latin typeface="Consolas"/>
-              </a:rPr>
-              <a:t>*</a:t>
-            </a:r>
-            <a:r>
-              <a:rPr sz="1600">
-                <a:solidFill>
-                  <a:srgbClr val="EEFFFF"/>
-                </a:solidFill>
-                <a:latin typeface="Consolas"/>
-              </a:rPr>
-              <a:t>page</a:t>
-            </a:r>
-            <a:r>
-              <a:rPr sz="1600">
-                <a:solidFill>
-                  <a:srgbClr val="BAC2DE"/>
-                </a:solidFill>
-                <a:latin typeface="Consolas"/>
-              </a:rPr>
-              <a:t>,</a:t>
-            </a:r>
-            <a:r>
-              <a:rPr sz="1600">
-                <a:solidFill>
-                  <a:srgbClr val="EEFFFF"/>
-                </a:solidFill>
-                <a:latin typeface="Consolas"/>
-              </a:rPr>
-              <a:t> </a:t>
-            </a:r>
-            <a:r>
-              <a:rPr sz="1600">
-                <a:solidFill>
-                  <a:srgbClr val="C3E88D"/>
-                </a:solidFill>
-                <a:latin typeface="Consolas"/>
-              </a:rPr>
-              <a:t>"</a:t>
-            </a:r>
-            <a:r>
-              <a:rPr sz="1600">
-                <a:solidFill>
-                  <a:srgbClr val="C3E88D"/>
-                </a:solidFill>
-                <a:latin typeface="Consolas"/>
-              </a:rPr>
-              <a:t>&lt;h1&gt;Hello&lt;/h1&gt;&lt;p&gt;Rust&lt;/p&gt;</a:t>
-            </a:r>
-            <a:r>
-              <a:rPr sz="1600">
-                <a:solidFill>
-                  <a:srgbClr val="C3E88D"/>
-                </a:solidFill>
-                <a:latin typeface="Consolas"/>
-              </a:rPr>
-              <a:t>"</a:t>
-            </a:r>
-            <a:r>
-              <a:rPr sz="1600">
-                <a:solidFill>
-                  <a:srgbClr val="BAC2DE"/>
-                </a:solidFill>
-                <a:latin typeface="Consolas"/>
-              </a:rPr>
-              <a:t>)</a:t>
-            </a:r>
-            <a:r>
-              <a:rPr sz="1600">
-                <a:solidFill>
-                  <a:srgbClr val="BAC2DE"/>
-                </a:solidFill>
-                <a:latin typeface="Consolas"/>
-              </a:rPr>
-              <a:t>;</a:t>
-            </a:r>
           </a:p>
           <a:p>
             <a:pPr>
@@ -5842,11 +5753,11 @@
             <a:r>
               <a:rPr sz="1600">
                 <a:solidFill>
-                  <a:srgbClr val="BAC2DE"/>
-                </a:solidFill>
-                <a:latin typeface="Consolas"/>
-              </a:rPr>
-              <a:t>}</a:t>
+                  <a:srgbClr val="6A9955"/>
+                </a:solidFill>
+                <a:latin typeface="Consolas"/>
+              </a:rPr>
+              <a:t>// A RangeSetCollection is any type that can be turned into an iterator</a:t>
             </a:r>
           </a:p>
           <a:p>
@@ -5861,6 +5772,15 @@
                 <a:spcPts val="0"/>
               </a:spcAft>
             </a:pPr>
+            <a:r>
+              <a:rPr sz="1600">
+                <a:solidFill>
+                  <a:srgbClr val="6A9955"/>
+                </a:solidFill>
+                <a:latin typeface="Consolas"/>
+              </a:rPr>
+              <a:t>// over borrowed RangeSetBlaze values.</a:t>
+            </a:r>
           </a:p>
           <a:p>
             <a:pPr>
@@ -5881,7 +5801,7 @@
                 </a:solidFill>
                 <a:latin typeface="Consolas"/>
               </a:rPr>
-              <a:t>// Good for `Box`, `Rc`, etc., but not really good here.</a:t>
+              <a:t>//</a:t>
             </a:r>
           </a:p>
           <a:p>
@@ -5903,7 +5823,3504 @@
                 </a:solidFill>
                 <a:latin typeface="Consolas"/>
               </a:rPr>
-              <a:t>// Also see AsRef, From, and Borrow traits.</a:t>
+              <a:t>// TECHNIQUE NAME: "blanket implementation".</a:t>
+            </a:r>
+          </a:p>
+          <a:p>
+            <a:pPr>
+              <a:lnSpc>
+                <a:spcPct val="95000"/>
+              </a:lnSpc>
+              <a:spcBef>
+                <a:spcPts val="0"/>
+              </a:spcBef>
+              <a:spcAft>
+                <a:spcPts val="0"/>
+              </a:spcAft>
+            </a:pPr>
+            <a:r>
+              <a:rPr sz="1600">
+                <a:solidFill>
+                  <a:srgbClr val="6A9955"/>
+                </a:solidFill>
+                <a:latin typeface="Consolas"/>
+              </a:rPr>
+              <a:t>// One impl applies to every type that matches the bound.</a:t>
+            </a:r>
+          </a:p>
+          <a:p>
+            <a:pPr>
+              <a:lnSpc>
+                <a:spcPct val="95000"/>
+              </a:lnSpc>
+              <a:spcBef>
+                <a:spcPts val="0"/>
+              </a:spcBef>
+              <a:spcAft>
+                <a:spcPts val="0"/>
+              </a:spcAft>
+            </a:pPr>
+            <a:r>
+              <a:rPr sz="1600">
+                <a:solidFill>
+                  <a:srgbClr val="C792EA"/>
+                </a:solidFill>
+                <a:latin typeface="Consolas"/>
+              </a:rPr>
+              <a:t>trait</a:t>
+            </a:r>
+            <a:r>
+              <a:rPr sz="1600">
+                <a:solidFill>
+                  <a:srgbClr val="EEFFFF"/>
+                </a:solidFill>
+                <a:latin typeface="Consolas"/>
+              </a:rPr>
+              <a:t> </a:t>
+            </a:r>
+            <a:r>
+              <a:rPr sz="1600">
+                <a:solidFill>
+                  <a:srgbClr val="EEFFFF"/>
+                </a:solidFill>
+                <a:latin typeface="Consolas"/>
+              </a:rPr>
+              <a:t>RangeSetCollection</a:t>
+            </a:r>
+            <a:r>
+              <a:rPr sz="1600">
+                <a:solidFill>
+                  <a:srgbClr val="89DDFF"/>
+                </a:solidFill>
+                <a:latin typeface="Consolas"/>
+              </a:rPr>
+              <a:t>&lt;</a:t>
+            </a:r>
+            <a:r>
+              <a:rPr sz="1600">
+                <a:solidFill>
+                  <a:srgbClr val="89DDFF"/>
+                </a:solidFill>
+                <a:latin typeface="Consolas"/>
+              </a:rPr>
+              <a:t>'</a:t>
+            </a:r>
+            <a:r>
+              <a:rPr sz="1600">
+                <a:solidFill>
+                  <a:srgbClr val="EEFFFF"/>
+                </a:solidFill>
+                <a:latin typeface="Consolas"/>
+              </a:rPr>
+              <a:t>a</a:t>
+            </a:r>
+            <a:r>
+              <a:rPr sz="1600">
+                <a:solidFill>
+                  <a:srgbClr val="89DDFF"/>
+                </a:solidFill>
+                <a:latin typeface="Consolas"/>
+              </a:rPr>
+              <a:t>&gt;</a:t>
+            </a:r>
+            <a:r>
+              <a:rPr sz="1600">
+                <a:solidFill>
+                  <a:srgbClr val="BAC2DE"/>
+                </a:solidFill>
+                <a:latin typeface="Consolas"/>
+              </a:rPr>
+              <a:t>:</a:t>
+            </a:r>
+            <a:r>
+              <a:rPr sz="1600">
+                <a:solidFill>
+                  <a:srgbClr val="EEFFFF"/>
+                </a:solidFill>
+                <a:latin typeface="Consolas"/>
+              </a:rPr>
+              <a:t> </a:t>
+            </a:r>
+            <a:r>
+              <a:rPr sz="1600">
+                <a:solidFill>
+                  <a:srgbClr val="89DDFF"/>
+                </a:solidFill>
+                <a:latin typeface="Consolas"/>
+              </a:rPr>
+              <a:t>IntoIterator</a:t>
+            </a:r>
+            <a:r>
+              <a:rPr sz="1600">
+                <a:solidFill>
+                  <a:srgbClr val="89DDFF"/>
+                </a:solidFill>
+                <a:latin typeface="Consolas"/>
+              </a:rPr>
+              <a:t>&lt;</a:t>
+            </a:r>
+            <a:r>
+              <a:rPr sz="1600">
+                <a:solidFill>
+                  <a:srgbClr val="EEFFFF"/>
+                </a:solidFill>
+                <a:latin typeface="Consolas"/>
+              </a:rPr>
+              <a:t>Item</a:t>
+            </a:r>
+            <a:r>
+              <a:rPr sz="1600">
+                <a:solidFill>
+                  <a:srgbClr val="EEFFFF"/>
+                </a:solidFill>
+                <a:latin typeface="Consolas"/>
+              </a:rPr>
+              <a:t> </a:t>
+            </a:r>
+            <a:r>
+              <a:rPr sz="1600">
+                <a:solidFill>
+                  <a:srgbClr val="89DDFF"/>
+                </a:solidFill>
+                <a:latin typeface="Consolas"/>
+              </a:rPr>
+              <a:t>=</a:t>
+            </a:r>
+            <a:r>
+              <a:rPr sz="1600">
+                <a:solidFill>
+                  <a:srgbClr val="EEFFFF"/>
+                </a:solidFill>
+                <a:latin typeface="Consolas"/>
+              </a:rPr>
+              <a:t> </a:t>
+            </a:r>
+            <a:r>
+              <a:rPr sz="1600">
+                <a:solidFill>
+                  <a:srgbClr val="89DDFF"/>
+                </a:solidFill>
+                <a:latin typeface="Consolas"/>
+              </a:rPr>
+              <a:t>&amp;</a:t>
+            </a:r>
+            <a:r>
+              <a:rPr sz="1600">
+                <a:solidFill>
+                  <a:srgbClr val="89DDFF"/>
+                </a:solidFill>
+                <a:latin typeface="Consolas"/>
+              </a:rPr>
+              <a:t>'</a:t>
+            </a:r>
+            <a:r>
+              <a:rPr sz="1600">
+                <a:solidFill>
+                  <a:srgbClr val="EEFFFF"/>
+                </a:solidFill>
+                <a:latin typeface="Consolas"/>
+              </a:rPr>
+              <a:t>a</a:t>
+            </a:r>
+            <a:r>
+              <a:rPr sz="1600">
+                <a:solidFill>
+                  <a:srgbClr val="EEFFFF"/>
+                </a:solidFill>
+                <a:latin typeface="Consolas"/>
+              </a:rPr>
+              <a:t> </a:t>
+            </a:r>
+            <a:r>
+              <a:rPr sz="1600">
+                <a:solidFill>
+                  <a:srgbClr val="EEFFFF"/>
+                </a:solidFill>
+                <a:latin typeface="Consolas"/>
+              </a:rPr>
+              <a:t>RangeSetBlaze</a:t>
+            </a:r>
+            <a:r>
+              <a:rPr sz="1600">
+                <a:solidFill>
+                  <a:srgbClr val="89DDFF"/>
+                </a:solidFill>
+                <a:latin typeface="Consolas"/>
+              </a:rPr>
+              <a:t>&gt;</a:t>
+            </a:r>
+            <a:r>
+              <a:rPr sz="1600">
+                <a:solidFill>
+                  <a:srgbClr val="EEFFFF"/>
+                </a:solidFill>
+                <a:latin typeface="Consolas"/>
+              </a:rPr>
+              <a:t> </a:t>
+            </a:r>
+            <a:r>
+              <a:rPr sz="1600">
+                <a:solidFill>
+                  <a:srgbClr val="BAC2DE"/>
+                </a:solidFill>
+                <a:latin typeface="Consolas"/>
+              </a:rPr>
+              <a:t>{</a:t>
+            </a:r>
+          </a:p>
+          <a:p>
+            <a:pPr>
+              <a:lnSpc>
+                <a:spcPct val="95000"/>
+              </a:lnSpc>
+              <a:spcBef>
+                <a:spcPts val="0"/>
+              </a:spcBef>
+              <a:spcAft>
+                <a:spcPts val="0"/>
+              </a:spcAft>
+            </a:pPr>
+            <a:r>
+              <a:rPr sz="1600">
+                <a:solidFill>
+                  <a:srgbClr val="EEFFFF"/>
+                </a:solidFill>
+                <a:latin typeface="Consolas"/>
+              </a:rPr>
+              <a:t>    </a:t>
+            </a:r>
+            <a:r>
+              <a:rPr sz="1600">
+                <a:solidFill>
+                  <a:srgbClr val="C792EA"/>
+                </a:solidFill>
+                <a:latin typeface="Consolas"/>
+              </a:rPr>
+              <a:t>fn</a:t>
+            </a:r>
+            <a:r>
+              <a:rPr sz="1600">
+                <a:solidFill>
+                  <a:srgbClr val="EEFFFF"/>
+                </a:solidFill>
+                <a:latin typeface="Consolas"/>
+              </a:rPr>
+              <a:t> </a:t>
+            </a:r>
+            <a:r>
+              <a:rPr sz="1600">
+                <a:solidFill>
+                  <a:srgbClr val="82AAFF"/>
+                </a:solidFill>
+                <a:latin typeface="Consolas"/>
+              </a:rPr>
+              <a:t>union</a:t>
+            </a:r>
+            <a:r>
+              <a:rPr sz="1600">
+                <a:solidFill>
+                  <a:srgbClr val="BAC2DE"/>
+                </a:solidFill>
+                <a:latin typeface="Consolas"/>
+              </a:rPr>
+              <a:t>(</a:t>
+            </a:r>
+            <a:r>
+              <a:rPr sz="1600">
+                <a:solidFill>
+                  <a:srgbClr val="89DDFF"/>
+                </a:solidFill>
+                <a:latin typeface="Consolas"/>
+              </a:rPr>
+              <a:t>self</a:t>
+            </a:r>
+            <a:r>
+              <a:rPr sz="1600">
+                <a:solidFill>
+                  <a:srgbClr val="BAC2DE"/>
+                </a:solidFill>
+                <a:latin typeface="Consolas"/>
+              </a:rPr>
+              <a:t>)</a:t>
+            </a:r>
+            <a:r>
+              <a:rPr sz="1600">
+                <a:solidFill>
+                  <a:srgbClr val="EEFFFF"/>
+                </a:solidFill>
+                <a:latin typeface="Consolas"/>
+              </a:rPr>
+              <a:t> </a:t>
+            </a:r>
+            <a:r>
+              <a:rPr sz="1600">
+                <a:solidFill>
+                  <a:srgbClr val="BAC2DE"/>
+                </a:solidFill>
+                <a:latin typeface="Consolas"/>
+              </a:rPr>
+              <a:t>-&gt;</a:t>
+            </a:r>
+            <a:r>
+              <a:rPr sz="1600">
+                <a:solidFill>
+                  <a:srgbClr val="EEFFFF"/>
+                </a:solidFill>
+                <a:latin typeface="Consolas"/>
+              </a:rPr>
+              <a:t> </a:t>
+            </a:r>
+            <a:r>
+              <a:rPr sz="1600">
+                <a:solidFill>
+                  <a:srgbClr val="FFCB6B"/>
+                </a:solidFill>
+                <a:latin typeface="Consolas"/>
+              </a:rPr>
+              <a:t>RangeSetBlaze</a:t>
+            </a:r>
+          </a:p>
+          <a:p>
+            <a:pPr>
+              <a:lnSpc>
+                <a:spcPct val="95000"/>
+              </a:lnSpc>
+              <a:spcBef>
+                <a:spcPts val="0"/>
+              </a:spcBef>
+              <a:spcAft>
+                <a:spcPts val="0"/>
+              </a:spcAft>
+            </a:pPr>
+            <a:r>
+              <a:rPr sz="1600">
+                <a:solidFill>
+                  <a:srgbClr val="EEFFFF"/>
+                </a:solidFill>
+                <a:latin typeface="Consolas"/>
+              </a:rPr>
+              <a:t>    </a:t>
+            </a:r>
+            <a:r>
+              <a:rPr sz="1600">
+                <a:solidFill>
+                  <a:srgbClr val="C792EA"/>
+                </a:solidFill>
+                <a:latin typeface="Consolas"/>
+              </a:rPr>
+              <a:t>where</a:t>
+            </a:r>
+          </a:p>
+          <a:p>
+            <a:pPr>
+              <a:lnSpc>
+                <a:spcPct val="95000"/>
+              </a:lnSpc>
+              <a:spcBef>
+                <a:spcPts val="0"/>
+              </a:spcBef>
+              <a:spcAft>
+                <a:spcPts val="0"/>
+              </a:spcAft>
+            </a:pPr>
+            <a:r>
+              <a:rPr sz="1600">
+                <a:solidFill>
+                  <a:srgbClr val="EEFFFF"/>
+                </a:solidFill>
+                <a:latin typeface="Consolas"/>
+              </a:rPr>
+              <a:t>        </a:t>
+            </a:r>
+            <a:r>
+              <a:rPr sz="1600">
+                <a:solidFill>
+                  <a:srgbClr val="89DDFF"/>
+                </a:solidFill>
+                <a:latin typeface="Consolas"/>
+              </a:rPr>
+              <a:t>Self</a:t>
+            </a:r>
+            <a:r>
+              <a:rPr sz="1600">
+                <a:solidFill>
+                  <a:srgbClr val="BAC2DE"/>
+                </a:solidFill>
+                <a:latin typeface="Consolas"/>
+              </a:rPr>
+              <a:t>:</a:t>
+            </a:r>
+            <a:r>
+              <a:rPr sz="1600">
+                <a:solidFill>
+                  <a:srgbClr val="EEFFFF"/>
+                </a:solidFill>
+                <a:latin typeface="Consolas"/>
+              </a:rPr>
+              <a:t> </a:t>
+            </a:r>
+            <a:r>
+              <a:rPr sz="1600">
+                <a:solidFill>
+                  <a:srgbClr val="89DDFF"/>
+                </a:solidFill>
+                <a:latin typeface="Consolas"/>
+              </a:rPr>
+              <a:t>Sized</a:t>
+            </a:r>
+            <a:r>
+              <a:rPr sz="1600">
+                <a:solidFill>
+                  <a:srgbClr val="BAC2DE"/>
+                </a:solidFill>
+                <a:latin typeface="Consolas"/>
+              </a:rPr>
+              <a:t>,</a:t>
+            </a:r>
+          </a:p>
+          <a:p>
+            <a:pPr>
+              <a:lnSpc>
+                <a:spcPct val="95000"/>
+              </a:lnSpc>
+              <a:spcBef>
+                <a:spcPts val="0"/>
+              </a:spcBef>
+              <a:spcAft>
+                <a:spcPts val="0"/>
+              </a:spcAft>
+            </a:pPr>
+            <a:r>
+              <a:rPr sz="1600">
+                <a:solidFill>
+                  <a:srgbClr val="EEFFFF"/>
+                </a:solidFill>
+                <a:latin typeface="Consolas"/>
+              </a:rPr>
+              <a:t>    </a:t>
+            </a:r>
+            <a:r>
+              <a:rPr sz="1600">
+                <a:solidFill>
+                  <a:srgbClr val="BAC2DE"/>
+                </a:solidFill>
+                <a:latin typeface="Consolas"/>
+              </a:rPr>
+              <a:t>{</a:t>
+            </a:r>
+          </a:p>
+          <a:p>
+            <a:pPr>
+              <a:lnSpc>
+                <a:spcPct val="95000"/>
+              </a:lnSpc>
+              <a:spcBef>
+                <a:spcPts val="0"/>
+              </a:spcBef>
+              <a:spcAft>
+                <a:spcPts val="0"/>
+              </a:spcAft>
+            </a:pPr>
+            <a:r>
+              <a:rPr sz="1600">
+                <a:solidFill>
+                  <a:srgbClr val="EEFFFF"/>
+                </a:solidFill>
+                <a:latin typeface="Consolas"/>
+              </a:rPr>
+              <a:t>        </a:t>
+            </a:r>
+            <a:r>
+              <a:rPr sz="1600">
+                <a:solidFill>
+                  <a:srgbClr val="C792EA"/>
+                </a:solidFill>
+                <a:latin typeface="Consolas"/>
+              </a:rPr>
+              <a:t>let</a:t>
+            </a:r>
+            <a:r>
+              <a:rPr sz="1600">
+                <a:solidFill>
+                  <a:srgbClr val="EEFFFF"/>
+                </a:solidFill>
+                <a:latin typeface="Consolas"/>
+              </a:rPr>
+              <a:t> </a:t>
+            </a:r>
+            <a:r>
+              <a:rPr sz="1600">
+                <a:solidFill>
+                  <a:srgbClr val="C792EA"/>
+                </a:solidFill>
+                <a:latin typeface="Consolas"/>
+              </a:rPr>
+              <a:t>mut</a:t>
+            </a:r>
+            <a:r>
+              <a:rPr sz="1600">
+                <a:solidFill>
+                  <a:srgbClr val="EEFFFF"/>
+                </a:solidFill>
+                <a:latin typeface="Consolas"/>
+              </a:rPr>
+              <a:t> </a:t>
+            </a:r>
+            <a:r>
+              <a:rPr sz="1600">
+                <a:solidFill>
+                  <a:srgbClr val="EEFFFF"/>
+                </a:solidFill>
+                <a:latin typeface="Consolas"/>
+              </a:rPr>
+              <a:t>result</a:t>
+            </a:r>
+            <a:r>
+              <a:rPr sz="1600">
+                <a:solidFill>
+                  <a:srgbClr val="EEFFFF"/>
+                </a:solidFill>
+                <a:latin typeface="Consolas"/>
+              </a:rPr>
+              <a:t> </a:t>
+            </a:r>
+            <a:r>
+              <a:rPr sz="1600">
+                <a:solidFill>
+                  <a:srgbClr val="89DDFF"/>
+                </a:solidFill>
+                <a:latin typeface="Consolas"/>
+              </a:rPr>
+              <a:t>=</a:t>
+            </a:r>
+            <a:r>
+              <a:rPr sz="1600">
+                <a:solidFill>
+                  <a:srgbClr val="EEFFFF"/>
+                </a:solidFill>
+                <a:latin typeface="Consolas"/>
+              </a:rPr>
+              <a:t> </a:t>
+            </a:r>
+            <a:r>
+              <a:rPr sz="1600">
+                <a:solidFill>
+                  <a:srgbClr val="EEFFFF"/>
+                </a:solidFill>
+                <a:latin typeface="Consolas"/>
+              </a:rPr>
+              <a:t>RangeSetBlaze</a:t>
+            </a:r>
+            <a:r>
+              <a:rPr sz="1600">
+                <a:solidFill>
+                  <a:srgbClr val="BAC2DE"/>
+                </a:solidFill>
+                <a:latin typeface="Consolas"/>
+              </a:rPr>
+              <a:t>::</a:t>
+            </a:r>
+            <a:r>
+              <a:rPr sz="1600">
+                <a:solidFill>
+                  <a:srgbClr val="EEFFFF"/>
+                </a:solidFill>
+                <a:latin typeface="Consolas"/>
+              </a:rPr>
+              <a:t>new</a:t>
+            </a:r>
+            <a:r>
+              <a:rPr sz="1600">
+                <a:solidFill>
+                  <a:srgbClr val="BAC2DE"/>
+                </a:solidFill>
+                <a:latin typeface="Consolas"/>
+              </a:rPr>
+              <a:t>(</a:t>
+            </a:r>
+            <a:r>
+              <a:rPr sz="1600">
+                <a:solidFill>
+                  <a:srgbClr val="BAC2DE"/>
+                </a:solidFill>
+                <a:latin typeface="Consolas"/>
+              </a:rPr>
+              <a:t>)</a:t>
+            </a:r>
+            <a:r>
+              <a:rPr sz="1600">
+                <a:solidFill>
+                  <a:srgbClr val="BAC2DE"/>
+                </a:solidFill>
+                <a:latin typeface="Consolas"/>
+              </a:rPr>
+              <a:t>;</a:t>
+            </a:r>
+          </a:p>
+          <a:p>
+            <a:pPr>
+              <a:lnSpc>
+                <a:spcPct val="95000"/>
+              </a:lnSpc>
+              <a:spcBef>
+                <a:spcPts val="0"/>
+              </a:spcBef>
+              <a:spcAft>
+                <a:spcPts val="0"/>
+              </a:spcAft>
+            </a:pPr>
+            <a:r>
+              <a:rPr sz="1600">
+                <a:solidFill>
+                  <a:srgbClr val="EEFFFF"/>
+                </a:solidFill>
+                <a:latin typeface="Consolas"/>
+              </a:rPr>
+              <a:t>        </a:t>
+            </a:r>
+            <a:r>
+              <a:rPr sz="1600">
+                <a:solidFill>
+                  <a:srgbClr val="C792EA"/>
+                </a:solidFill>
+                <a:latin typeface="Consolas"/>
+              </a:rPr>
+              <a:t>for</a:t>
+            </a:r>
+            <a:r>
+              <a:rPr sz="1600">
+                <a:solidFill>
+                  <a:srgbClr val="EEFFFF"/>
+                </a:solidFill>
+                <a:latin typeface="Consolas"/>
+              </a:rPr>
+              <a:t> </a:t>
+            </a:r>
+            <a:r>
+              <a:rPr sz="1600">
+                <a:solidFill>
+                  <a:srgbClr val="EEFFFF"/>
+                </a:solidFill>
+                <a:latin typeface="Consolas"/>
+              </a:rPr>
+              <a:t>set</a:t>
+            </a:r>
+            <a:r>
+              <a:rPr sz="1600">
+                <a:solidFill>
+                  <a:srgbClr val="EEFFFF"/>
+                </a:solidFill>
+                <a:latin typeface="Consolas"/>
+              </a:rPr>
+              <a:t> </a:t>
+            </a:r>
+            <a:r>
+              <a:rPr sz="1600">
+                <a:solidFill>
+                  <a:srgbClr val="C792EA"/>
+                </a:solidFill>
+                <a:latin typeface="Consolas"/>
+              </a:rPr>
+              <a:t>in</a:t>
+            </a:r>
+            <a:r>
+              <a:rPr sz="1600">
+                <a:solidFill>
+                  <a:srgbClr val="EEFFFF"/>
+                </a:solidFill>
+                <a:latin typeface="Consolas"/>
+              </a:rPr>
+              <a:t> </a:t>
+            </a:r>
+            <a:r>
+              <a:rPr sz="1600">
+                <a:solidFill>
+                  <a:srgbClr val="89DDFF"/>
+                </a:solidFill>
+                <a:latin typeface="Consolas"/>
+              </a:rPr>
+              <a:t>self</a:t>
+            </a:r>
+            <a:r>
+              <a:rPr sz="1600">
+                <a:solidFill>
+                  <a:srgbClr val="EEFFFF"/>
+                </a:solidFill>
+                <a:latin typeface="Consolas"/>
+              </a:rPr>
+              <a:t> </a:t>
+            </a:r>
+            <a:r>
+              <a:rPr sz="1600">
+                <a:solidFill>
+                  <a:srgbClr val="BAC2DE"/>
+                </a:solidFill>
+                <a:latin typeface="Consolas"/>
+              </a:rPr>
+              <a:t>{</a:t>
+            </a:r>
+          </a:p>
+          <a:p>
+            <a:pPr>
+              <a:lnSpc>
+                <a:spcPct val="95000"/>
+              </a:lnSpc>
+              <a:spcBef>
+                <a:spcPts val="0"/>
+              </a:spcBef>
+              <a:spcAft>
+                <a:spcPts val="0"/>
+              </a:spcAft>
+            </a:pPr>
+            <a:r>
+              <a:rPr sz="1600">
+                <a:solidFill>
+                  <a:srgbClr val="EEFFFF"/>
+                </a:solidFill>
+                <a:latin typeface="Consolas"/>
+              </a:rPr>
+              <a:t>            </a:t>
+            </a:r>
+            <a:r>
+              <a:rPr sz="1600">
+                <a:solidFill>
+                  <a:srgbClr val="EEFFFF"/>
+                </a:solidFill>
+                <a:latin typeface="Consolas"/>
+              </a:rPr>
+              <a:t>result</a:t>
+            </a:r>
+            <a:r>
+              <a:rPr sz="1600">
+                <a:solidFill>
+                  <a:srgbClr val="EEFFFF"/>
+                </a:solidFill>
+                <a:latin typeface="Consolas"/>
+              </a:rPr>
+              <a:t> </a:t>
+            </a:r>
+            <a:r>
+              <a:rPr sz="1600">
+                <a:solidFill>
+                  <a:srgbClr val="89DDFF"/>
+                </a:solidFill>
+                <a:latin typeface="Consolas"/>
+              </a:rPr>
+              <a:t>=</a:t>
+            </a:r>
+            <a:r>
+              <a:rPr sz="1600">
+                <a:solidFill>
+                  <a:srgbClr val="EEFFFF"/>
+                </a:solidFill>
+                <a:latin typeface="Consolas"/>
+              </a:rPr>
+              <a:t> </a:t>
+            </a:r>
+            <a:r>
+              <a:rPr sz="1600">
+                <a:solidFill>
+                  <a:srgbClr val="EEFFFF"/>
+                </a:solidFill>
+                <a:latin typeface="Consolas"/>
+              </a:rPr>
+              <a:t>RangeSetBlaze</a:t>
+            </a:r>
+            <a:r>
+              <a:rPr sz="1600">
+                <a:solidFill>
+                  <a:srgbClr val="BAC2DE"/>
+                </a:solidFill>
+                <a:latin typeface="Consolas"/>
+              </a:rPr>
+              <a:t>::</a:t>
+            </a:r>
+            <a:r>
+              <a:rPr sz="1600">
+                <a:solidFill>
+                  <a:srgbClr val="C792EA"/>
+                </a:solidFill>
+                <a:latin typeface="Consolas"/>
+              </a:rPr>
+              <a:t>union</a:t>
+            </a:r>
+            <a:r>
+              <a:rPr sz="1600">
+                <a:solidFill>
+                  <a:srgbClr val="BAC2DE"/>
+                </a:solidFill>
+                <a:latin typeface="Consolas"/>
+              </a:rPr>
+              <a:t>(</a:t>
+            </a:r>
+            <a:r>
+              <a:rPr sz="1600">
+                <a:solidFill>
+                  <a:srgbClr val="89DDFF"/>
+                </a:solidFill>
+                <a:latin typeface="Consolas"/>
+              </a:rPr>
+              <a:t>&amp;</a:t>
+            </a:r>
+            <a:r>
+              <a:rPr sz="1600">
+                <a:solidFill>
+                  <a:srgbClr val="EEFFFF"/>
+                </a:solidFill>
+                <a:latin typeface="Consolas"/>
+              </a:rPr>
+              <a:t>result</a:t>
+            </a:r>
+            <a:r>
+              <a:rPr sz="1600">
+                <a:solidFill>
+                  <a:srgbClr val="BAC2DE"/>
+                </a:solidFill>
+                <a:latin typeface="Consolas"/>
+              </a:rPr>
+              <a:t>,</a:t>
+            </a:r>
+            <a:r>
+              <a:rPr sz="1600">
+                <a:solidFill>
+                  <a:srgbClr val="EEFFFF"/>
+                </a:solidFill>
+                <a:latin typeface="Consolas"/>
+              </a:rPr>
+              <a:t> </a:t>
+            </a:r>
+            <a:r>
+              <a:rPr sz="1600">
+                <a:solidFill>
+                  <a:srgbClr val="EEFFFF"/>
+                </a:solidFill>
+                <a:latin typeface="Consolas"/>
+              </a:rPr>
+              <a:t>set</a:t>
+            </a:r>
+            <a:r>
+              <a:rPr sz="1600">
+                <a:solidFill>
+                  <a:srgbClr val="BAC2DE"/>
+                </a:solidFill>
+                <a:latin typeface="Consolas"/>
+              </a:rPr>
+              <a:t>)</a:t>
+            </a:r>
+            <a:r>
+              <a:rPr sz="1600">
+                <a:solidFill>
+                  <a:srgbClr val="BAC2DE"/>
+                </a:solidFill>
+                <a:latin typeface="Consolas"/>
+              </a:rPr>
+              <a:t>;</a:t>
+            </a:r>
+          </a:p>
+          <a:p>
+            <a:pPr>
+              <a:lnSpc>
+                <a:spcPct val="95000"/>
+              </a:lnSpc>
+              <a:spcBef>
+                <a:spcPts val="0"/>
+              </a:spcBef>
+              <a:spcAft>
+                <a:spcPts val="0"/>
+              </a:spcAft>
+            </a:pPr>
+            <a:r>
+              <a:rPr sz="1600">
+                <a:solidFill>
+                  <a:srgbClr val="EEFFFF"/>
+                </a:solidFill>
+                <a:latin typeface="Consolas"/>
+              </a:rPr>
+              <a:t>        </a:t>
+            </a:r>
+            <a:r>
+              <a:rPr sz="1600">
+                <a:solidFill>
+                  <a:srgbClr val="BAC2DE"/>
+                </a:solidFill>
+                <a:latin typeface="Consolas"/>
+              </a:rPr>
+              <a:t>}</a:t>
+            </a:r>
+          </a:p>
+          <a:p>
+            <a:pPr>
+              <a:lnSpc>
+                <a:spcPct val="95000"/>
+              </a:lnSpc>
+              <a:spcBef>
+                <a:spcPts val="0"/>
+              </a:spcBef>
+              <a:spcAft>
+                <a:spcPts val="0"/>
+              </a:spcAft>
+            </a:pPr>
+            <a:r>
+              <a:rPr sz="1600">
+                <a:solidFill>
+                  <a:srgbClr val="EEFFFF"/>
+                </a:solidFill>
+                <a:latin typeface="Consolas"/>
+              </a:rPr>
+              <a:t>        </a:t>
+            </a:r>
+            <a:r>
+              <a:rPr sz="1600">
+                <a:solidFill>
+                  <a:srgbClr val="EEFFFF"/>
+                </a:solidFill>
+                <a:latin typeface="Consolas"/>
+              </a:rPr>
+              <a:t>result</a:t>
+            </a:r>
+          </a:p>
+        </p:txBody>
+      </p:sp>
+    </p:spTree>
+  </p:cSld>
+  <p:clrMapOvr>
+    <a:masterClrMapping/>
+  </p:clrMapOvr>
+</p:sld>
+</file>
+
+<file path=ppt/slides/slide4.xml><?xml version="1.0" encoding="utf-8"?>
+<p:sld xmlns:a="http://schemas.openxmlformats.org/drawingml/2006/main" xmlns:p="http://schemas.openxmlformats.org/presentationml/2006/main" xmlns:r="http://schemas.openxmlformats.org/officeDocument/2006/relationships">
+  <p:cSld>
+    <p:spTree>
+      <p:nvGrpSpPr>
+        <p:cNvPr id="1" name=""/>
+        <p:cNvGrpSpPr/>
+        <p:nvPr/>
+      </p:nvGrpSpPr>
+      <p:grpSpPr/>
+      <p:sp>
+        <p:nvSpPr>
+          <p:cNvPr id="2" name="Rectangle 1"/>
+          <p:cNvSpPr/>
+          <p:nvPr/>
+        </p:nvSpPr>
+        <p:spPr>
+          <a:xfrm>
+            <a:off x="0" y="0"/>
+            <a:ext cx="9144000" cy="6858000"/>
+          </a:xfrm>
+          <a:prstGeom prst="rect">
+            <a:avLst/>
+          </a:prstGeom>
+          <a:solidFill>
+            <a:srgbClr val="000000"/>
+          </a:solidFill>
+          <a:ln>
+            <a:noFill/>
+          </a:ln>
+        </p:spPr>
+        <p:style>
+          <a:lnRef idx="1">
+            <a:schemeClr val="accent1"/>
+          </a:lnRef>
+          <a:fillRef idx="3">
+            <a:schemeClr val="accent1"/>
+          </a:fillRef>
+          <a:effectRef idx="2">
+            <a:schemeClr val="accent1"/>
+          </a:effectRef>
+          <a:fontRef idx="minor">
+            <a:schemeClr val="lt1"/>
+          </a:fontRef>
+        </p:style>
+        <p:txBody>
+          <a:bodyPr rtlCol="0" anchor="ctr"/>
+          <a:lstStyle/>
+          <a:p>
+            <a:pPr algn="ctr"/>
+          </a:p>
+        </p:txBody>
+      </p:sp>
+      <p:sp>
+        <p:nvSpPr>
+          <p:cNvPr id="3" name="TextBox 2"/>
+          <p:cNvSpPr txBox="1"/>
+          <p:nvPr/>
+        </p:nvSpPr>
+        <p:spPr>
+          <a:xfrm>
+            <a:off x="164592" y="109728"/>
+            <a:ext cx="8814816" cy="6638544"/>
+          </a:xfrm>
+          <a:prstGeom prst="rect">
+            <a:avLst/>
+          </a:prstGeom>
+          <a:noFill/>
+        </p:spPr>
+        <p:txBody>
+          <a:bodyPr wrap="square">
+            <a:noAutofit/>
+          </a:bodyPr>
+          <a:lstStyle/>
+          <a:p>
+            <a:pPr>
+              <a:lnSpc>
+                <a:spcPct val="95000"/>
+              </a:lnSpc>
+              <a:spcBef>
+                <a:spcPts val="0"/>
+              </a:spcBef>
+              <a:spcAft>
+                <a:spcPts val="0"/>
+              </a:spcAft>
+            </a:pPr>
+            <a:r>
+              <a:rPr sz="1600">
+                <a:solidFill>
+                  <a:srgbClr val="EEFFFF"/>
+                </a:solidFill>
+                <a:latin typeface="Consolas"/>
+              </a:rPr>
+              <a:t>    </a:t>
+            </a:r>
+            <a:r>
+              <a:rPr sz="1600">
+                <a:solidFill>
+                  <a:srgbClr val="BAC2DE"/>
+                </a:solidFill>
+                <a:latin typeface="Consolas"/>
+              </a:rPr>
+              <a:t>}</a:t>
+            </a:r>
+          </a:p>
+          <a:p>
+            <a:pPr>
+              <a:lnSpc>
+                <a:spcPct val="95000"/>
+              </a:lnSpc>
+              <a:spcBef>
+                <a:spcPts val="0"/>
+              </a:spcBef>
+              <a:spcAft>
+                <a:spcPts val="0"/>
+              </a:spcAft>
+            </a:pPr>
+            <a:r>
+              <a:rPr sz="1600">
+                <a:solidFill>
+                  <a:srgbClr val="BAC2DE"/>
+                </a:solidFill>
+                <a:latin typeface="Consolas"/>
+              </a:rPr>
+              <a:t>}</a:t>
+            </a:r>
+          </a:p>
+          <a:p>
+            <a:pPr>
+              <a:lnSpc>
+                <a:spcPct val="95000"/>
+              </a:lnSpc>
+              <a:spcBef>
+                <a:spcPts val="0"/>
+              </a:spcBef>
+              <a:spcAft>
+                <a:spcPts val="0"/>
+              </a:spcAft>
+            </a:pPr>
+          </a:p>
+          <a:p>
+            <a:pPr>
+              <a:lnSpc>
+                <a:spcPct val="95000"/>
+              </a:lnSpc>
+              <a:spcBef>
+                <a:spcPts val="0"/>
+              </a:spcBef>
+              <a:spcAft>
+                <a:spcPts val="0"/>
+              </a:spcAft>
+            </a:pPr>
+            <a:r>
+              <a:rPr sz="1600">
+                <a:solidFill>
+                  <a:srgbClr val="6A9955"/>
+                </a:solidFill>
+                <a:latin typeface="Consolas"/>
+              </a:rPr>
+              <a:t>// Blanket implementation:</a:t>
+            </a:r>
+          </a:p>
+          <a:p>
+            <a:pPr>
+              <a:lnSpc>
+                <a:spcPct val="95000"/>
+              </a:lnSpc>
+              <a:spcBef>
+                <a:spcPts val="0"/>
+              </a:spcBef>
+              <a:spcAft>
+                <a:spcPts val="0"/>
+              </a:spcAft>
+            </a:pPr>
+            <a:r>
+              <a:rPr sz="1600">
+                <a:solidFill>
+                  <a:srgbClr val="6A9955"/>
+                </a:solidFill>
+                <a:latin typeface="Consolas"/>
+              </a:rPr>
+              <a:t>// Any type that can be turned into an iterator over &amp;RangeSetBlaze</a:t>
+            </a:r>
+          </a:p>
+          <a:p>
+            <a:pPr>
+              <a:lnSpc>
+                <a:spcPct val="95000"/>
+              </a:lnSpc>
+              <a:spcBef>
+                <a:spcPts val="0"/>
+              </a:spcBef>
+              <a:spcAft>
+                <a:spcPts val="0"/>
+              </a:spcAft>
+            </a:pPr>
+            <a:r>
+              <a:rPr sz="1600">
+                <a:solidFill>
+                  <a:srgbClr val="6A9955"/>
+                </a:solidFill>
+                <a:latin typeface="Consolas"/>
+              </a:rPr>
+              <a:t>// automatically implements RangeSetCollection.</a:t>
+            </a:r>
+          </a:p>
+          <a:p>
+            <a:pPr>
+              <a:lnSpc>
+                <a:spcPct val="95000"/>
+              </a:lnSpc>
+              <a:spcBef>
+                <a:spcPts val="0"/>
+              </a:spcBef>
+              <a:spcAft>
+                <a:spcPts val="0"/>
+              </a:spcAft>
+            </a:pPr>
+            <a:r>
+              <a:rPr sz="1600">
+                <a:solidFill>
+                  <a:srgbClr val="C792EA"/>
+                </a:solidFill>
+                <a:latin typeface="Consolas"/>
+              </a:rPr>
+              <a:t>impl</a:t>
+            </a:r>
+            <a:r>
+              <a:rPr sz="1600">
+                <a:solidFill>
+                  <a:srgbClr val="89DDFF"/>
+                </a:solidFill>
+                <a:latin typeface="Consolas"/>
+              </a:rPr>
+              <a:t>&lt;</a:t>
+            </a:r>
+            <a:r>
+              <a:rPr sz="1600">
+                <a:solidFill>
+                  <a:srgbClr val="89DDFF"/>
+                </a:solidFill>
+                <a:latin typeface="Consolas"/>
+              </a:rPr>
+              <a:t>'</a:t>
+            </a:r>
+            <a:r>
+              <a:rPr sz="1600">
+                <a:solidFill>
+                  <a:srgbClr val="EEFFFF"/>
+                </a:solidFill>
+                <a:latin typeface="Consolas"/>
+              </a:rPr>
+              <a:t>a</a:t>
+            </a:r>
+            <a:r>
+              <a:rPr sz="1600">
+                <a:solidFill>
+                  <a:srgbClr val="BAC2DE"/>
+                </a:solidFill>
+                <a:latin typeface="Consolas"/>
+              </a:rPr>
+              <a:t>,</a:t>
+            </a:r>
+            <a:r>
+              <a:rPr sz="1600">
+                <a:solidFill>
+                  <a:srgbClr val="EEFFFF"/>
+                </a:solidFill>
+                <a:latin typeface="Consolas"/>
+              </a:rPr>
+              <a:t> </a:t>
+            </a:r>
+            <a:r>
+              <a:rPr sz="1600">
+                <a:solidFill>
+                  <a:srgbClr val="EEFFFF"/>
+                </a:solidFill>
+                <a:latin typeface="Consolas"/>
+              </a:rPr>
+              <a:t>I</a:t>
+            </a:r>
+            <a:r>
+              <a:rPr sz="1600">
+                <a:solidFill>
+                  <a:srgbClr val="89DDFF"/>
+                </a:solidFill>
+                <a:latin typeface="Consolas"/>
+              </a:rPr>
+              <a:t>&gt;</a:t>
+            </a:r>
+            <a:r>
+              <a:rPr sz="1600">
+                <a:solidFill>
+                  <a:srgbClr val="EEFFFF"/>
+                </a:solidFill>
+                <a:latin typeface="Consolas"/>
+              </a:rPr>
+              <a:t> </a:t>
+            </a:r>
+            <a:r>
+              <a:rPr sz="1600">
+                <a:solidFill>
+                  <a:srgbClr val="EEFFFF"/>
+                </a:solidFill>
+                <a:latin typeface="Consolas"/>
+              </a:rPr>
+              <a:t>RangeSetCollection</a:t>
+            </a:r>
+            <a:r>
+              <a:rPr sz="1600">
+                <a:solidFill>
+                  <a:srgbClr val="89DDFF"/>
+                </a:solidFill>
+                <a:latin typeface="Consolas"/>
+              </a:rPr>
+              <a:t>&lt;</a:t>
+            </a:r>
+            <a:r>
+              <a:rPr sz="1600">
+                <a:solidFill>
+                  <a:srgbClr val="89DDFF"/>
+                </a:solidFill>
+                <a:latin typeface="Consolas"/>
+              </a:rPr>
+              <a:t>'</a:t>
+            </a:r>
+            <a:r>
+              <a:rPr sz="1600">
+                <a:solidFill>
+                  <a:srgbClr val="EEFFFF"/>
+                </a:solidFill>
+                <a:latin typeface="Consolas"/>
+              </a:rPr>
+              <a:t>a</a:t>
+            </a:r>
+            <a:r>
+              <a:rPr sz="1600">
+                <a:solidFill>
+                  <a:srgbClr val="89DDFF"/>
+                </a:solidFill>
+                <a:latin typeface="Consolas"/>
+              </a:rPr>
+              <a:t>&gt;</a:t>
+            </a:r>
+            <a:r>
+              <a:rPr sz="1600">
+                <a:solidFill>
+                  <a:srgbClr val="EEFFFF"/>
+                </a:solidFill>
+                <a:latin typeface="Consolas"/>
+              </a:rPr>
+              <a:t> </a:t>
+            </a:r>
+            <a:r>
+              <a:rPr sz="1600">
+                <a:solidFill>
+                  <a:srgbClr val="C792EA"/>
+                </a:solidFill>
+                <a:latin typeface="Consolas"/>
+              </a:rPr>
+              <a:t>for</a:t>
+            </a:r>
+            <a:r>
+              <a:rPr sz="1600">
+                <a:solidFill>
+                  <a:srgbClr val="EEFFFF"/>
+                </a:solidFill>
+                <a:latin typeface="Consolas"/>
+              </a:rPr>
+              <a:t> </a:t>
+            </a:r>
+            <a:r>
+              <a:rPr sz="1600">
+                <a:solidFill>
+                  <a:srgbClr val="EEFFFF"/>
+                </a:solidFill>
+                <a:latin typeface="Consolas"/>
+              </a:rPr>
+              <a:t>I</a:t>
+            </a:r>
+            <a:r>
+              <a:rPr sz="1600">
+                <a:solidFill>
+                  <a:srgbClr val="EEFFFF"/>
+                </a:solidFill>
+                <a:latin typeface="Consolas"/>
+              </a:rPr>
+              <a:t> </a:t>
+            </a:r>
+            <a:r>
+              <a:rPr sz="1600">
+                <a:solidFill>
+                  <a:srgbClr val="C792EA"/>
+                </a:solidFill>
+                <a:latin typeface="Consolas"/>
+              </a:rPr>
+              <a:t>where</a:t>
+            </a:r>
+            <a:r>
+              <a:rPr sz="1600">
+                <a:solidFill>
+                  <a:srgbClr val="EEFFFF"/>
+                </a:solidFill>
+                <a:latin typeface="Consolas"/>
+              </a:rPr>
+              <a:t> </a:t>
+            </a:r>
+            <a:r>
+              <a:rPr sz="1600">
+                <a:solidFill>
+                  <a:srgbClr val="EEFFFF"/>
+                </a:solidFill>
+                <a:latin typeface="Consolas"/>
+              </a:rPr>
+              <a:t>I</a:t>
+            </a:r>
+            <a:r>
+              <a:rPr sz="1600">
+                <a:solidFill>
+                  <a:srgbClr val="BAC2DE"/>
+                </a:solidFill>
+                <a:latin typeface="Consolas"/>
+              </a:rPr>
+              <a:t>:</a:t>
+            </a:r>
+            <a:r>
+              <a:rPr sz="1600">
+                <a:solidFill>
+                  <a:srgbClr val="EEFFFF"/>
+                </a:solidFill>
+                <a:latin typeface="Consolas"/>
+              </a:rPr>
+              <a:t> </a:t>
+            </a:r>
+            <a:r>
+              <a:rPr sz="1600">
+                <a:solidFill>
+                  <a:srgbClr val="89DDFF"/>
+                </a:solidFill>
+                <a:latin typeface="Consolas"/>
+              </a:rPr>
+              <a:t>IntoIterator</a:t>
+            </a:r>
+            <a:r>
+              <a:rPr sz="1600">
+                <a:solidFill>
+                  <a:srgbClr val="89DDFF"/>
+                </a:solidFill>
+                <a:latin typeface="Consolas"/>
+              </a:rPr>
+              <a:t>&lt;</a:t>
+            </a:r>
+            <a:r>
+              <a:rPr sz="1600">
+                <a:solidFill>
+                  <a:srgbClr val="EEFFFF"/>
+                </a:solidFill>
+                <a:latin typeface="Consolas"/>
+              </a:rPr>
+              <a:t>Item</a:t>
+            </a:r>
+            <a:r>
+              <a:rPr sz="1600">
+                <a:solidFill>
+                  <a:srgbClr val="EEFFFF"/>
+                </a:solidFill>
+                <a:latin typeface="Consolas"/>
+              </a:rPr>
+              <a:t> </a:t>
+            </a:r>
+            <a:r>
+              <a:rPr sz="1600">
+                <a:solidFill>
+                  <a:srgbClr val="89DDFF"/>
+                </a:solidFill>
+                <a:latin typeface="Consolas"/>
+              </a:rPr>
+              <a:t>=</a:t>
+            </a:r>
+            <a:r>
+              <a:rPr sz="1600">
+                <a:solidFill>
+                  <a:srgbClr val="EEFFFF"/>
+                </a:solidFill>
+                <a:latin typeface="Consolas"/>
+              </a:rPr>
+              <a:t> </a:t>
+            </a:r>
+            <a:r>
+              <a:rPr sz="1600">
+                <a:solidFill>
+                  <a:srgbClr val="89DDFF"/>
+                </a:solidFill>
+                <a:latin typeface="Consolas"/>
+              </a:rPr>
+              <a:t>&amp;</a:t>
+            </a:r>
+            <a:r>
+              <a:rPr sz="1600">
+                <a:solidFill>
+                  <a:srgbClr val="89DDFF"/>
+                </a:solidFill>
+                <a:latin typeface="Consolas"/>
+              </a:rPr>
+              <a:t>'</a:t>
+            </a:r>
+            <a:r>
+              <a:rPr sz="1600">
+                <a:solidFill>
+                  <a:srgbClr val="EEFFFF"/>
+                </a:solidFill>
+                <a:latin typeface="Consolas"/>
+              </a:rPr>
+              <a:t>a</a:t>
+            </a:r>
+            <a:r>
+              <a:rPr sz="1600">
+                <a:solidFill>
+                  <a:srgbClr val="EEFFFF"/>
+                </a:solidFill>
+                <a:latin typeface="Consolas"/>
+              </a:rPr>
+              <a:t> </a:t>
+            </a:r>
+            <a:r>
+              <a:rPr sz="1600">
+                <a:solidFill>
+                  <a:srgbClr val="EEFFFF"/>
+                </a:solidFill>
+                <a:latin typeface="Consolas"/>
+              </a:rPr>
+              <a:t>RangeSetBlaze</a:t>
+            </a:r>
+            <a:r>
+              <a:rPr sz="1600">
+                <a:solidFill>
+                  <a:srgbClr val="89DDFF"/>
+                </a:solidFill>
+                <a:latin typeface="Consolas"/>
+              </a:rPr>
+              <a:t>&gt;</a:t>
+            </a:r>
+            <a:r>
+              <a:rPr sz="1600">
+                <a:solidFill>
+                  <a:srgbClr val="EEFFFF"/>
+                </a:solidFill>
+                <a:latin typeface="Consolas"/>
+              </a:rPr>
+              <a:t> </a:t>
+            </a:r>
+            <a:r>
+              <a:rPr sz="1600">
+                <a:solidFill>
+                  <a:srgbClr val="BAC2DE"/>
+                </a:solidFill>
+                <a:latin typeface="Consolas"/>
+              </a:rPr>
+              <a:t>{</a:t>
+            </a:r>
+            <a:r>
+              <a:rPr sz="1600">
+                <a:solidFill>
+                  <a:srgbClr val="BAC2DE"/>
+                </a:solidFill>
+                <a:latin typeface="Consolas"/>
+              </a:rPr>
+              <a:t>}</a:t>
+            </a:r>
+          </a:p>
+          <a:p>
+            <a:pPr>
+              <a:lnSpc>
+                <a:spcPct val="95000"/>
+              </a:lnSpc>
+              <a:spcBef>
+                <a:spcPts val="0"/>
+              </a:spcBef>
+              <a:spcAft>
+                <a:spcPts val="0"/>
+              </a:spcAft>
+            </a:pPr>
+          </a:p>
+          <a:p>
+            <a:pPr>
+              <a:lnSpc>
+                <a:spcPct val="95000"/>
+              </a:lnSpc>
+              <a:spcBef>
+                <a:spcPts val="0"/>
+              </a:spcBef>
+              <a:spcAft>
+                <a:spcPts val="0"/>
+              </a:spcAft>
+            </a:pPr>
+            <a:r>
+              <a:rPr sz="1600">
+                <a:solidFill>
+                  <a:srgbClr val="C792EA"/>
+                </a:solidFill>
+                <a:latin typeface="Consolas"/>
+              </a:rPr>
+              <a:t>fn</a:t>
+            </a:r>
+            <a:r>
+              <a:rPr sz="1600">
+                <a:solidFill>
+                  <a:srgbClr val="EEFFFF"/>
+                </a:solidFill>
+                <a:latin typeface="Consolas"/>
+              </a:rPr>
+              <a:t> </a:t>
+            </a:r>
+            <a:r>
+              <a:rPr sz="1600">
+                <a:solidFill>
+                  <a:srgbClr val="82AAFF"/>
+                </a:solidFill>
+                <a:latin typeface="Consolas"/>
+              </a:rPr>
+              <a:t>main</a:t>
+            </a:r>
+            <a:r>
+              <a:rPr sz="1600">
+                <a:solidFill>
+                  <a:srgbClr val="BAC2DE"/>
+                </a:solidFill>
+                <a:latin typeface="Consolas"/>
+              </a:rPr>
+              <a:t>(</a:t>
+            </a:r>
+            <a:r>
+              <a:rPr sz="1600">
+                <a:solidFill>
+                  <a:srgbClr val="BAC2DE"/>
+                </a:solidFill>
+                <a:latin typeface="Consolas"/>
+              </a:rPr>
+              <a:t>)</a:t>
+            </a:r>
+            <a:r>
+              <a:rPr sz="1600">
+                <a:solidFill>
+                  <a:srgbClr val="EEFFFF"/>
+                </a:solidFill>
+                <a:latin typeface="Consolas"/>
+              </a:rPr>
+              <a:t> </a:t>
+            </a:r>
+            <a:r>
+              <a:rPr sz="1600">
+                <a:solidFill>
+                  <a:srgbClr val="BAC2DE"/>
+                </a:solidFill>
+                <a:latin typeface="Consolas"/>
+              </a:rPr>
+              <a:t>{</a:t>
+            </a:r>
+          </a:p>
+          <a:p>
+            <a:pPr>
+              <a:lnSpc>
+                <a:spcPct val="95000"/>
+              </a:lnSpc>
+              <a:spcBef>
+                <a:spcPts val="0"/>
+              </a:spcBef>
+              <a:spcAft>
+                <a:spcPts val="0"/>
+              </a:spcAft>
+            </a:pPr>
+            <a:r>
+              <a:rPr sz="1600">
+                <a:solidFill>
+                  <a:srgbClr val="EEFFFF"/>
+                </a:solidFill>
+                <a:latin typeface="Consolas"/>
+              </a:rPr>
+              <a:t>    </a:t>
+            </a:r>
+            <a:r>
+              <a:rPr sz="1600">
+                <a:solidFill>
+                  <a:srgbClr val="C792EA"/>
+                </a:solidFill>
+                <a:latin typeface="Consolas"/>
+              </a:rPr>
+              <a:t>let</a:t>
+            </a:r>
+            <a:r>
+              <a:rPr sz="1600">
+                <a:solidFill>
+                  <a:srgbClr val="EEFFFF"/>
+                </a:solidFill>
+                <a:latin typeface="Consolas"/>
+              </a:rPr>
+              <a:t> </a:t>
+            </a:r>
+            <a:r>
+              <a:rPr sz="1600">
+                <a:solidFill>
+                  <a:srgbClr val="EEFFFF"/>
+                </a:solidFill>
+                <a:latin typeface="Consolas"/>
+              </a:rPr>
+              <a:t>a</a:t>
+            </a:r>
+            <a:r>
+              <a:rPr sz="1600">
+                <a:solidFill>
+                  <a:srgbClr val="EEFFFF"/>
+                </a:solidFill>
+                <a:latin typeface="Consolas"/>
+              </a:rPr>
+              <a:t> </a:t>
+            </a:r>
+            <a:r>
+              <a:rPr sz="1600">
+                <a:solidFill>
+                  <a:srgbClr val="89DDFF"/>
+                </a:solidFill>
+                <a:latin typeface="Consolas"/>
+              </a:rPr>
+              <a:t>=</a:t>
+            </a:r>
+            <a:r>
+              <a:rPr sz="1600">
+                <a:solidFill>
+                  <a:srgbClr val="EEFFFF"/>
+                </a:solidFill>
+                <a:latin typeface="Consolas"/>
+              </a:rPr>
+              <a:t> </a:t>
+            </a:r>
+            <a:r>
+              <a:rPr sz="1600">
+                <a:solidFill>
+                  <a:srgbClr val="EEFFFF"/>
+                </a:solidFill>
+                <a:latin typeface="Consolas"/>
+              </a:rPr>
+              <a:t>RangeSetBlaze</a:t>
+            </a:r>
+            <a:r>
+              <a:rPr sz="1600">
+                <a:solidFill>
+                  <a:srgbClr val="BAC2DE"/>
+                </a:solidFill>
+                <a:latin typeface="Consolas"/>
+              </a:rPr>
+              <a:t>::</a:t>
+            </a:r>
+            <a:r>
+              <a:rPr sz="1600">
+                <a:solidFill>
+                  <a:srgbClr val="EEFFFF"/>
+                </a:solidFill>
+                <a:latin typeface="Consolas"/>
+              </a:rPr>
+              <a:t>from_slice</a:t>
+            </a:r>
+            <a:r>
+              <a:rPr sz="1600">
+                <a:solidFill>
+                  <a:srgbClr val="BAC2DE"/>
+                </a:solidFill>
+                <a:latin typeface="Consolas"/>
+              </a:rPr>
+              <a:t>(</a:t>
+            </a:r>
+            <a:r>
+              <a:rPr sz="1600">
+                <a:solidFill>
+                  <a:srgbClr val="89DDFF"/>
+                </a:solidFill>
+                <a:latin typeface="Consolas"/>
+              </a:rPr>
+              <a:t>&amp;</a:t>
+            </a:r>
+            <a:r>
+              <a:rPr sz="1600">
+                <a:solidFill>
+                  <a:srgbClr val="BAC2DE"/>
+                </a:solidFill>
+                <a:latin typeface="Consolas"/>
+              </a:rPr>
+              <a:t>[</a:t>
+            </a:r>
+            <a:r>
+              <a:rPr sz="1600">
+                <a:solidFill>
+                  <a:srgbClr val="F78C6C"/>
+                </a:solidFill>
+                <a:latin typeface="Consolas"/>
+              </a:rPr>
+              <a:t>1</a:t>
+            </a:r>
+            <a:r>
+              <a:rPr sz="1600">
+                <a:solidFill>
+                  <a:srgbClr val="BAC2DE"/>
+                </a:solidFill>
+                <a:latin typeface="Consolas"/>
+              </a:rPr>
+              <a:t>,</a:t>
+            </a:r>
+            <a:r>
+              <a:rPr sz="1600">
+                <a:solidFill>
+                  <a:srgbClr val="EEFFFF"/>
+                </a:solidFill>
+                <a:latin typeface="Consolas"/>
+              </a:rPr>
+              <a:t> </a:t>
+            </a:r>
+            <a:r>
+              <a:rPr sz="1600">
+                <a:solidFill>
+                  <a:srgbClr val="F78C6C"/>
+                </a:solidFill>
+                <a:latin typeface="Consolas"/>
+              </a:rPr>
+              <a:t>2</a:t>
+            </a:r>
+            <a:r>
+              <a:rPr sz="1600">
+                <a:solidFill>
+                  <a:srgbClr val="BAC2DE"/>
+                </a:solidFill>
+                <a:latin typeface="Consolas"/>
+              </a:rPr>
+              <a:t>,</a:t>
+            </a:r>
+            <a:r>
+              <a:rPr sz="1600">
+                <a:solidFill>
+                  <a:srgbClr val="EEFFFF"/>
+                </a:solidFill>
+                <a:latin typeface="Consolas"/>
+              </a:rPr>
+              <a:t> </a:t>
+            </a:r>
+            <a:r>
+              <a:rPr sz="1600">
+                <a:solidFill>
+                  <a:srgbClr val="F78C6C"/>
+                </a:solidFill>
+                <a:latin typeface="Consolas"/>
+              </a:rPr>
+              <a:t>3</a:t>
+            </a:r>
+            <a:r>
+              <a:rPr sz="1600">
+                <a:solidFill>
+                  <a:srgbClr val="BAC2DE"/>
+                </a:solidFill>
+                <a:latin typeface="Consolas"/>
+              </a:rPr>
+              <a:t>]</a:t>
+            </a:r>
+            <a:r>
+              <a:rPr sz="1600">
+                <a:solidFill>
+                  <a:srgbClr val="BAC2DE"/>
+                </a:solidFill>
+                <a:latin typeface="Consolas"/>
+              </a:rPr>
+              <a:t>)</a:t>
+            </a:r>
+            <a:r>
+              <a:rPr sz="1600">
+                <a:solidFill>
+                  <a:srgbClr val="BAC2DE"/>
+                </a:solidFill>
+                <a:latin typeface="Consolas"/>
+              </a:rPr>
+              <a:t>;</a:t>
+            </a:r>
+          </a:p>
+          <a:p>
+            <a:pPr>
+              <a:lnSpc>
+                <a:spcPct val="95000"/>
+              </a:lnSpc>
+              <a:spcBef>
+                <a:spcPts val="0"/>
+              </a:spcBef>
+              <a:spcAft>
+                <a:spcPts val="0"/>
+              </a:spcAft>
+            </a:pPr>
+            <a:r>
+              <a:rPr sz="1600">
+                <a:solidFill>
+                  <a:srgbClr val="EEFFFF"/>
+                </a:solidFill>
+                <a:latin typeface="Consolas"/>
+              </a:rPr>
+              <a:t>    </a:t>
+            </a:r>
+            <a:r>
+              <a:rPr sz="1600">
+                <a:solidFill>
+                  <a:srgbClr val="C792EA"/>
+                </a:solidFill>
+                <a:latin typeface="Consolas"/>
+              </a:rPr>
+              <a:t>let</a:t>
+            </a:r>
+            <a:r>
+              <a:rPr sz="1600">
+                <a:solidFill>
+                  <a:srgbClr val="EEFFFF"/>
+                </a:solidFill>
+                <a:latin typeface="Consolas"/>
+              </a:rPr>
+              <a:t> </a:t>
+            </a:r>
+            <a:r>
+              <a:rPr sz="1600">
+                <a:solidFill>
+                  <a:srgbClr val="EEFFFF"/>
+                </a:solidFill>
+                <a:latin typeface="Consolas"/>
+              </a:rPr>
+              <a:t>b</a:t>
+            </a:r>
+            <a:r>
+              <a:rPr sz="1600">
+                <a:solidFill>
+                  <a:srgbClr val="EEFFFF"/>
+                </a:solidFill>
+                <a:latin typeface="Consolas"/>
+              </a:rPr>
+              <a:t> </a:t>
+            </a:r>
+            <a:r>
+              <a:rPr sz="1600">
+                <a:solidFill>
+                  <a:srgbClr val="89DDFF"/>
+                </a:solidFill>
+                <a:latin typeface="Consolas"/>
+              </a:rPr>
+              <a:t>=</a:t>
+            </a:r>
+            <a:r>
+              <a:rPr sz="1600">
+                <a:solidFill>
+                  <a:srgbClr val="EEFFFF"/>
+                </a:solidFill>
+                <a:latin typeface="Consolas"/>
+              </a:rPr>
+              <a:t> </a:t>
+            </a:r>
+            <a:r>
+              <a:rPr sz="1600">
+                <a:solidFill>
+                  <a:srgbClr val="EEFFFF"/>
+                </a:solidFill>
+                <a:latin typeface="Consolas"/>
+              </a:rPr>
+              <a:t>RangeSetBlaze</a:t>
+            </a:r>
+            <a:r>
+              <a:rPr sz="1600">
+                <a:solidFill>
+                  <a:srgbClr val="BAC2DE"/>
+                </a:solidFill>
+                <a:latin typeface="Consolas"/>
+              </a:rPr>
+              <a:t>::</a:t>
+            </a:r>
+            <a:r>
+              <a:rPr sz="1600">
+                <a:solidFill>
+                  <a:srgbClr val="EEFFFF"/>
+                </a:solidFill>
+                <a:latin typeface="Consolas"/>
+              </a:rPr>
+              <a:t>from_slice</a:t>
+            </a:r>
+            <a:r>
+              <a:rPr sz="1600">
+                <a:solidFill>
+                  <a:srgbClr val="BAC2DE"/>
+                </a:solidFill>
+                <a:latin typeface="Consolas"/>
+              </a:rPr>
+              <a:t>(</a:t>
+            </a:r>
+            <a:r>
+              <a:rPr sz="1600">
+                <a:solidFill>
+                  <a:srgbClr val="89DDFF"/>
+                </a:solidFill>
+                <a:latin typeface="Consolas"/>
+              </a:rPr>
+              <a:t>&amp;</a:t>
+            </a:r>
+            <a:r>
+              <a:rPr sz="1600">
+                <a:solidFill>
+                  <a:srgbClr val="BAC2DE"/>
+                </a:solidFill>
+                <a:latin typeface="Consolas"/>
+              </a:rPr>
+              <a:t>[</a:t>
+            </a:r>
+            <a:r>
+              <a:rPr sz="1600">
+                <a:solidFill>
+                  <a:srgbClr val="F78C6C"/>
+                </a:solidFill>
+                <a:latin typeface="Consolas"/>
+              </a:rPr>
+              <a:t>3</a:t>
+            </a:r>
+            <a:r>
+              <a:rPr sz="1600">
+                <a:solidFill>
+                  <a:srgbClr val="BAC2DE"/>
+                </a:solidFill>
+                <a:latin typeface="Consolas"/>
+              </a:rPr>
+              <a:t>,</a:t>
+            </a:r>
+            <a:r>
+              <a:rPr sz="1600">
+                <a:solidFill>
+                  <a:srgbClr val="EEFFFF"/>
+                </a:solidFill>
+                <a:latin typeface="Consolas"/>
+              </a:rPr>
+              <a:t> </a:t>
+            </a:r>
+            <a:r>
+              <a:rPr sz="1600">
+                <a:solidFill>
+                  <a:srgbClr val="F78C6C"/>
+                </a:solidFill>
+                <a:latin typeface="Consolas"/>
+              </a:rPr>
+              <a:t>4</a:t>
+            </a:r>
+            <a:r>
+              <a:rPr sz="1600">
+                <a:solidFill>
+                  <a:srgbClr val="BAC2DE"/>
+                </a:solidFill>
+                <a:latin typeface="Consolas"/>
+              </a:rPr>
+              <a:t>,</a:t>
+            </a:r>
+            <a:r>
+              <a:rPr sz="1600">
+                <a:solidFill>
+                  <a:srgbClr val="EEFFFF"/>
+                </a:solidFill>
+                <a:latin typeface="Consolas"/>
+              </a:rPr>
+              <a:t> </a:t>
+            </a:r>
+            <a:r>
+              <a:rPr sz="1600">
+                <a:solidFill>
+                  <a:srgbClr val="F78C6C"/>
+                </a:solidFill>
+                <a:latin typeface="Consolas"/>
+              </a:rPr>
+              <a:t>5</a:t>
+            </a:r>
+            <a:r>
+              <a:rPr sz="1600">
+                <a:solidFill>
+                  <a:srgbClr val="BAC2DE"/>
+                </a:solidFill>
+                <a:latin typeface="Consolas"/>
+              </a:rPr>
+              <a:t>]</a:t>
+            </a:r>
+            <a:r>
+              <a:rPr sz="1600">
+                <a:solidFill>
+                  <a:srgbClr val="BAC2DE"/>
+                </a:solidFill>
+                <a:latin typeface="Consolas"/>
+              </a:rPr>
+              <a:t>)</a:t>
+            </a:r>
+            <a:r>
+              <a:rPr sz="1600">
+                <a:solidFill>
+                  <a:srgbClr val="BAC2DE"/>
+                </a:solidFill>
+                <a:latin typeface="Consolas"/>
+              </a:rPr>
+              <a:t>;</a:t>
+            </a:r>
+          </a:p>
+          <a:p>
+            <a:pPr>
+              <a:lnSpc>
+                <a:spcPct val="95000"/>
+              </a:lnSpc>
+              <a:spcBef>
+                <a:spcPts val="0"/>
+              </a:spcBef>
+              <a:spcAft>
+                <a:spcPts val="0"/>
+              </a:spcAft>
+            </a:pPr>
+            <a:r>
+              <a:rPr sz="1600">
+                <a:solidFill>
+                  <a:srgbClr val="EEFFFF"/>
+                </a:solidFill>
+                <a:latin typeface="Consolas"/>
+              </a:rPr>
+              <a:t>    </a:t>
+            </a:r>
+            <a:r>
+              <a:rPr sz="1600">
+                <a:solidFill>
+                  <a:srgbClr val="C792EA"/>
+                </a:solidFill>
+                <a:latin typeface="Consolas"/>
+              </a:rPr>
+              <a:t>let</a:t>
+            </a:r>
+            <a:r>
+              <a:rPr sz="1600">
+                <a:solidFill>
+                  <a:srgbClr val="EEFFFF"/>
+                </a:solidFill>
+                <a:latin typeface="Consolas"/>
+              </a:rPr>
+              <a:t> </a:t>
+            </a:r>
+            <a:r>
+              <a:rPr sz="1600">
+                <a:solidFill>
+                  <a:srgbClr val="EEFFFF"/>
+                </a:solidFill>
+                <a:latin typeface="Consolas"/>
+              </a:rPr>
+              <a:t>c</a:t>
+            </a:r>
+            <a:r>
+              <a:rPr sz="1600">
+                <a:solidFill>
+                  <a:srgbClr val="EEFFFF"/>
+                </a:solidFill>
+                <a:latin typeface="Consolas"/>
+              </a:rPr>
+              <a:t> </a:t>
+            </a:r>
+            <a:r>
+              <a:rPr sz="1600">
+                <a:solidFill>
+                  <a:srgbClr val="89DDFF"/>
+                </a:solidFill>
+                <a:latin typeface="Consolas"/>
+              </a:rPr>
+              <a:t>=</a:t>
+            </a:r>
+            <a:r>
+              <a:rPr sz="1600">
+                <a:solidFill>
+                  <a:srgbClr val="EEFFFF"/>
+                </a:solidFill>
+                <a:latin typeface="Consolas"/>
+              </a:rPr>
+              <a:t> </a:t>
+            </a:r>
+            <a:r>
+              <a:rPr sz="1600">
+                <a:solidFill>
+                  <a:srgbClr val="EEFFFF"/>
+                </a:solidFill>
+                <a:latin typeface="Consolas"/>
+              </a:rPr>
+              <a:t>RangeSetBlaze</a:t>
+            </a:r>
+            <a:r>
+              <a:rPr sz="1600">
+                <a:solidFill>
+                  <a:srgbClr val="BAC2DE"/>
+                </a:solidFill>
+                <a:latin typeface="Consolas"/>
+              </a:rPr>
+              <a:t>::</a:t>
+            </a:r>
+            <a:r>
+              <a:rPr sz="1600">
+                <a:solidFill>
+                  <a:srgbClr val="EEFFFF"/>
+                </a:solidFill>
+                <a:latin typeface="Consolas"/>
+              </a:rPr>
+              <a:t>from_slice</a:t>
+            </a:r>
+            <a:r>
+              <a:rPr sz="1600">
+                <a:solidFill>
+                  <a:srgbClr val="BAC2DE"/>
+                </a:solidFill>
+                <a:latin typeface="Consolas"/>
+              </a:rPr>
+              <a:t>(</a:t>
+            </a:r>
+            <a:r>
+              <a:rPr sz="1600">
+                <a:solidFill>
+                  <a:srgbClr val="89DDFF"/>
+                </a:solidFill>
+                <a:latin typeface="Consolas"/>
+              </a:rPr>
+              <a:t>&amp;</a:t>
+            </a:r>
+            <a:r>
+              <a:rPr sz="1600">
+                <a:solidFill>
+                  <a:srgbClr val="BAC2DE"/>
+                </a:solidFill>
+                <a:latin typeface="Consolas"/>
+              </a:rPr>
+              <a:t>[</a:t>
+            </a:r>
+            <a:r>
+              <a:rPr sz="1600">
+                <a:solidFill>
+                  <a:srgbClr val="F78C6C"/>
+                </a:solidFill>
+                <a:latin typeface="Consolas"/>
+              </a:rPr>
+              <a:t>5</a:t>
+            </a:r>
+            <a:r>
+              <a:rPr sz="1600">
+                <a:solidFill>
+                  <a:srgbClr val="BAC2DE"/>
+                </a:solidFill>
+                <a:latin typeface="Consolas"/>
+              </a:rPr>
+              <a:t>,</a:t>
+            </a:r>
+            <a:r>
+              <a:rPr sz="1600">
+                <a:solidFill>
+                  <a:srgbClr val="EEFFFF"/>
+                </a:solidFill>
+                <a:latin typeface="Consolas"/>
+              </a:rPr>
+              <a:t> </a:t>
+            </a:r>
+            <a:r>
+              <a:rPr sz="1600">
+                <a:solidFill>
+                  <a:srgbClr val="F78C6C"/>
+                </a:solidFill>
+                <a:latin typeface="Consolas"/>
+              </a:rPr>
+              <a:t>7</a:t>
+            </a:r>
+            <a:r>
+              <a:rPr sz="1600">
+                <a:solidFill>
+                  <a:srgbClr val="BAC2DE"/>
+                </a:solidFill>
+                <a:latin typeface="Consolas"/>
+              </a:rPr>
+              <a:t>,</a:t>
+            </a:r>
+            <a:r>
+              <a:rPr sz="1600">
+                <a:solidFill>
+                  <a:srgbClr val="EEFFFF"/>
+                </a:solidFill>
+                <a:latin typeface="Consolas"/>
+              </a:rPr>
+              <a:t> </a:t>
+            </a:r>
+            <a:r>
+              <a:rPr sz="1600">
+                <a:solidFill>
+                  <a:srgbClr val="F78C6C"/>
+                </a:solidFill>
+                <a:latin typeface="Consolas"/>
+              </a:rPr>
+              <a:t>9</a:t>
+            </a:r>
+            <a:r>
+              <a:rPr sz="1600">
+                <a:solidFill>
+                  <a:srgbClr val="BAC2DE"/>
+                </a:solidFill>
+                <a:latin typeface="Consolas"/>
+              </a:rPr>
+              <a:t>]</a:t>
+            </a:r>
+            <a:r>
+              <a:rPr sz="1600">
+                <a:solidFill>
+                  <a:srgbClr val="BAC2DE"/>
+                </a:solidFill>
+                <a:latin typeface="Consolas"/>
+              </a:rPr>
+              <a:t>)</a:t>
+            </a:r>
+            <a:r>
+              <a:rPr sz="1600">
+                <a:solidFill>
+                  <a:srgbClr val="BAC2DE"/>
+                </a:solidFill>
+                <a:latin typeface="Consolas"/>
+              </a:rPr>
+              <a:t>;</a:t>
+            </a:r>
+          </a:p>
+          <a:p>
+            <a:pPr>
+              <a:lnSpc>
+                <a:spcPct val="95000"/>
+              </a:lnSpc>
+              <a:spcBef>
+                <a:spcPts val="0"/>
+              </a:spcBef>
+              <a:spcAft>
+                <a:spcPts val="0"/>
+              </a:spcAft>
+            </a:pPr>
+          </a:p>
+          <a:p>
+            <a:pPr>
+              <a:lnSpc>
+                <a:spcPct val="95000"/>
+              </a:lnSpc>
+              <a:spcBef>
+                <a:spcPts val="0"/>
+              </a:spcBef>
+              <a:spcAft>
+                <a:spcPts val="0"/>
+              </a:spcAft>
+            </a:pPr>
+            <a:r>
+              <a:rPr sz="1600">
+                <a:solidFill>
+                  <a:srgbClr val="EEFFFF"/>
+                </a:solidFill>
+                <a:latin typeface="Consolas"/>
+              </a:rPr>
+              <a:t>    </a:t>
+            </a:r>
+            <a:r>
+              <a:rPr sz="1600">
+                <a:solidFill>
+                  <a:srgbClr val="C792EA"/>
+                </a:solidFill>
+                <a:latin typeface="Consolas"/>
+              </a:rPr>
+              <a:t>let</a:t>
+            </a:r>
+            <a:r>
+              <a:rPr sz="1600">
+                <a:solidFill>
+                  <a:srgbClr val="EEFFFF"/>
+                </a:solidFill>
+                <a:latin typeface="Consolas"/>
+              </a:rPr>
+              <a:t> </a:t>
+            </a:r>
+            <a:r>
+              <a:rPr sz="1600">
+                <a:solidFill>
+                  <a:srgbClr val="EEFFFF"/>
+                </a:solidFill>
+                <a:latin typeface="Consolas"/>
+              </a:rPr>
+              <a:t>expected</a:t>
+            </a:r>
+            <a:r>
+              <a:rPr sz="1600">
+                <a:solidFill>
+                  <a:srgbClr val="EEFFFF"/>
+                </a:solidFill>
+                <a:latin typeface="Consolas"/>
+              </a:rPr>
+              <a:t> </a:t>
+            </a:r>
+            <a:r>
+              <a:rPr sz="1600">
+                <a:solidFill>
+                  <a:srgbClr val="89DDFF"/>
+                </a:solidFill>
+                <a:latin typeface="Consolas"/>
+              </a:rPr>
+              <a:t>=</a:t>
+            </a:r>
+            <a:r>
+              <a:rPr sz="1600">
+                <a:solidFill>
+                  <a:srgbClr val="EEFFFF"/>
+                </a:solidFill>
+                <a:latin typeface="Consolas"/>
+              </a:rPr>
+              <a:t> </a:t>
+            </a:r>
+            <a:r>
+              <a:rPr sz="1600">
+                <a:solidFill>
+                  <a:srgbClr val="EEFFFF"/>
+                </a:solidFill>
+                <a:latin typeface="Consolas"/>
+              </a:rPr>
+              <a:t>RangeSetBlaze</a:t>
+            </a:r>
+            <a:r>
+              <a:rPr sz="1600">
+                <a:solidFill>
+                  <a:srgbClr val="BAC2DE"/>
+                </a:solidFill>
+                <a:latin typeface="Consolas"/>
+              </a:rPr>
+              <a:t>::</a:t>
+            </a:r>
+            <a:r>
+              <a:rPr sz="1600">
+                <a:solidFill>
+                  <a:srgbClr val="EEFFFF"/>
+                </a:solidFill>
+                <a:latin typeface="Consolas"/>
+              </a:rPr>
+              <a:t>from_slice</a:t>
+            </a:r>
+            <a:r>
+              <a:rPr sz="1600">
+                <a:solidFill>
+                  <a:srgbClr val="BAC2DE"/>
+                </a:solidFill>
+                <a:latin typeface="Consolas"/>
+              </a:rPr>
+              <a:t>(</a:t>
+            </a:r>
+            <a:r>
+              <a:rPr sz="1600">
+                <a:solidFill>
+                  <a:srgbClr val="89DDFF"/>
+                </a:solidFill>
+                <a:latin typeface="Consolas"/>
+              </a:rPr>
+              <a:t>&amp;</a:t>
+            </a:r>
+            <a:r>
+              <a:rPr sz="1600">
+                <a:solidFill>
+                  <a:srgbClr val="BAC2DE"/>
+                </a:solidFill>
+                <a:latin typeface="Consolas"/>
+              </a:rPr>
+              <a:t>[</a:t>
+            </a:r>
+            <a:r>
+              <a:rPr sz="1600">
+                <a:solidFill>
+                  <a:srgbClr val="F78C6C"/>
+                </a:solidFill>
+                <a:latin typeface="Consolas"/>
+              </a:rPr>
+              <a:t>1</a:t>
+            </a:r>
+            <a:r>
+              <a:rPr sz="1600">
+                <a:solidFill>
+                  <a:srgbClr val="BAC2DE"/>
+                </a:solidFill>
+                <a:latin typeface="Consolas"/>
+              </a:rPr>
+              <a:t>,</a:t>
+            </a:r>
+            <a:r>
+              <a:rPr sz="1600">
+                <a:solidFill>
+                  <a:srgbClr val="EEFFFF"/>
+                </a:solidFill>
+                <a:latin typeface="Consolas"/>
+              </a:rPr>
+              <a:t> </a:t>
+            </a:r>
+            <a:r>
+              <a:rPr sz="1600">
+                <a:solidFill>
+                  <a:srgbClr val="F78C6C"/>
+                </a:solidFill>
+                <a:latin typeface="Consolas"/>
+              </a:rPr>
+              <a:t>2</a:t>
+            </a:r>
+            <a:r>
+              <a:rPr sz="1600">
+                <a:solidFill>
+                  <a:srgbClr val="BAC2DE"/>
+                </a:solidFill>
+                <a:latin typeface="Consolas"/>
+              </a:rPr>
+              <a:t>,</a:t>
+            </a:r>
+            <a:r>
+              <a:rPr sz="1600">
+                <a:solidFill>
+                  <a:srgbClr val="EEFFFF"/>
+                </a:solidFill>
+                <a:latin typeface="Consolas"/>
+              </a:rPr>
+              <a:t> </a:t>
+            </a:r>
+            <a:r>
+              <a:rPr sz="1600">
+                <a:solidFill>
+                  <a:srgbClr val="F78C6C"/>
+                </a:solidFill>
+                <a:latin typeface="Consolas"/>
+              </a:rPr>
+              <a:t>3</a:t>
+            </a:r>
+            <a:r>
+              <a:rPr sz="1600">
+                <a:solidFill>
+                  <a:srgbClr val="BAC2DE"/>
+                </a:solidFill>
+                <a:latin typeface="Consolas"/>
+              </a:rPr>
+              <a:t>,</a:t>
+            </a:r>
+            <a:r>
+              <a:rPr sz="1600">
+                <a:solidFill>
+                  <a:srgbClr val="EEFFFF"/>
+                </a:solidFill>
+                <a:latin typeface="Consolas"/>
+              </a:rPr>
+              <a:t> </a:t>
+            </a:r>
+            <a:r>
+              <a:rPr sz="1600">
+                <a:solidFill>
+                  <a:srgbClr val="F78C6C"/>
+                </a:solidFill>
+                <a:latin typeface="Consolas"/>
+              </a:rPr>
+              <a:t>4</a:t>
+            </a:r>
+            <a:r>
+              <a:rPr sz="1600">
+                <a:solidFill>
+                  <a:srgbClr val="BAC2DE"/>
+                </a:solidFill>
+                <a:latin typeface="Consolas"/>
+              </a:rPr>
+              <a:t>,</a:t>
+            </a:r>
+            <a:r>
+              <a:rPr sz="1600">
+                <a:solidFill>
+                  <a:srgbClr val="EEFFFF"/>
+                </a:solidFill>
+                <a:latin typeface="Consolas"/>
+              </a:rPr>
+              <a:t> </a:t>
+            </a:r>
+            <a:r>
+              <a:rPr sz="1600">
+                <a:solidFill>
+                  <a:srgbClr val="F78C6C"/>
+                </a:solidFill>
+                <a:latin typeface="Consolas"/>
+              </a:rPr>
+              <a:t>5</a:t>
+            </a:r>
+            <a:r>
+              <a:rPr sz="1600">
+                <a:solidFill>
+                  <a:srgbClr val="BAC2DE"/>
+                </a:solidFill>
+                <a:latin typeface="Consolas"/>
+              </a:rPr>
+              <a:t>,</a:t>
+            </a:r>
+            <a:r>
+              <a:rPr sz="1600">
+                <a:solidFill>
+                  <a:srgbClr val="EEFFFF"/>
+                </a:solidFill>
+                <a:latin typeface="Consolas"/>
+              </a:rPr>
+              <a:t> </a:t>
+            </a:r>
+            <a:r>
+              <a:rPr sz="1600">
+                <a:solidFill>
+                  <a:srgbClr val="F78C6C"/>
+                </a:solidFill>
+                <a:latin typeface="Consolas"/>
+              </a:rPr>
+              <a:t>7</a:t>
+            </a:r>
+            <a:r>
+              <a:rPr sz="1600">
+                <a:solidFill>
+                  <a:srgbClr val="BAC2DE"/>
+                </a:solidFill>
+                <a:latin typeface="Consolas"/>
+              </a:rPr>
+              <a:t>,</a:t>
+            </a:r>
+            <a:r>
+              <a:rPr sz="1600">
+                <a:solidFill>
+                  <a:srgbClr val="EEFFFF"/>
+                </a:solidFill>
+                <a:latin typeface="Consolas"/>
+              </a:rPr>
+              <a:t> </a:t>
+            </a:r>
+            <a:r>
+              <a:rPr sz="1600">
+                <a:solidFill>
+                  <a:srgbClr val="F78C6C"/>
+                </a:solidFill>
+                <a:latin typeface="Consolas"/>
+              </a:rPr>
+              <a:t>9</a:t>
+            </a:r>
+            <a:r>
+              <a:rPr sz="1600">
+                <a:solidFill>
+                  <a:srgbClr val="BAC2DE"/>
+                </a:solidFill>
+                <a:latin typeface="Consolas"/>
+              </a:rPr>
+              <a:t>]</a:t>
+            </a:r>
+            <a:r>
+              <a:rPr sz="1600">
+                <a:solidFill>
+                  <a:srgbClr val="BAC2DE"/>
+                </a:solidFill>
+                <a:latin typeface="Consolas"/>
+              </a:rPr>
+              <a:t>)</a:t>
+            </a:r>
+            <a:r>
+              <a:rPr sz="1600">
+                <a:solidFill>
+                  <a:srgbClr val="BAC2DE"/>
+                </a:solidFill>
+                <a:latin typeface="Consolas"/>
+              </a:rPr>
+              <a:t>;</a:t>
+            </a:r>
+          </a:p>
+          <a:p>
+            <a:pPr>
+              <a:lnSpc>
+                <a:spcPct val="95000"/>
+              </a:lnSpc>
+              <a:spcBef>
+                <a:spcPts val="0"/>
+              </a:spcBef>
+              <a:spcAft>
+                <a:spcPts val="0"/>
+              </a:spcAft>
+            </a:pPr>
+            <a:r>
+              <a:rPr sz="1600">
+                <a:solidFill>
+                  <a:srgbClr val="EEFFFF"/>
+                </a:solidFill>
+                <a:latin typeface="Consolas"/>
+              </a:rPr>
+              <a:t>    </a:t>
+            </a:r>
+            <a:r>
+              <a:rPr sz="1600">
+                <a:solidFill>
+                  <a:srgbClr val="6A9955"/>
+                </a:solidFill>
+                <a:latin typeface="Consolas"/>
+              </a:rPr>
+              <a:t>// A vector of sets can be unioned together.</a:t>
+            </a:r>
+          </a:p>
+          <a:p>
+            <a:pPr>
+              <a:lnSpc>
+                <a:spcPct val="95000"/>
+              </a:lnSpc>
+              <a:spcBef>
+                <a:spcPts val="0"/>
+              </a:spcBef>
+              <a:spcAft>
+                <a:spcPts val="0"/>
+              </a:spcAft>
+            </a:pPr>
+            <a:r>
+              <a:rPr sz="1600">
+                <a:solidFill>
+                  <a:srgbClr val="EEFFFF"/>
+                </a:solidFill>
+                <a:latin typeface="Consolas"/>
+              </a:rPr>
+              <a:t>    </a:t>
+            </a:r>
+            <a:r>
+              <a:rPr sz="1600">
+                <a:solidFill>
+                  <a:srgbClr val="82AAFF"/>
+                </a:solidFill>
+                <a:latin typeface="Consolas"/>
+              </a:rPr>
+              <a:t>assert_eq!</a:t>
+            </a:r>
+            <a:r>
+              <a:rPr sz="1600">
+                <a:solidFill>
+                  <a:srgbClr val="BAC2DE"/>
+                </a:solidFill>
+                <a:latin typeface="Consolas"/>
+              </a:rPr>
+              <a:t>(</a:t>
+            </a:r>
+            <a:r>
+              <a:rPr sz="1600">
+                <a:solidFill>
+                  <a:srgbClr val="82AAFF"/>
+                </a:solidFill>
+                <a:latin typeface="Consolas"/>
+              </a:rPr>
+              <a:t>vec!</a:t>
+            </a:r>
+            <a:r>
+              <a:rPr sz="1600">
+                <a:solidFill>
+                  <a:srgbClr val="BAC2DE"/>
+                </a:solidFill>
+                <a:latin typeface="Consolas"/>
+              </a:rPr>
+              <a:t>[</a:t>
+            </a:r>
+            <a:r>
+              <a:rPr sz="1600">
+                <a:solidFill>
+                  <a:srgbClr val="89DDFF"/>
+                </a:solidFill>
+                <a:latin typeface="Consolas"/>
+              </a:rPr>
+              <a:t>&amp;</a:t>
+            </a:r>
+            <a:r>
+              <a:rPr sz="1600">
+                <a:solidFill>
+                  <a:srgbClr val="EEFFFF"/>
+                </a:solidFill>
+                <a:latin typeface="Consolas"/>
+              </a:rPr>
+              <a:t>a</a:t>
+            </a:r>
+            <a:r>
+              <a:rPr sz="1600">
+                <a:solidFill>
+                  <a:srgbClr val="BAC2DE"/>
+                </a:solidFill>
+                <a:latin typeface="Consolas"/>
+              </a:rPr>
+              <a:t>,</a:t>
+            </a:r>
+            <a:r>
+              <a:rPr sz="1600">
+                <a:solidFill>
+                  <a:srgbClr val="EEFFFF"/>
+                </a:solidFill>
+                <a:latin typeface="Consolas"/>
+              </a:rPr>
+              <a:t> </a:t>
+            </a:r>
+            <a:r>
+              <a:rPr sz="1600">
+                <a:solidFill>
+                  <a:srgbClr val="89DDFF"/>
+                </a:solidFill>
+                <a:latin typeface="Consolas"/>
+              </a:rPr>
+              <a:t>&amp;</a:t>
+            </a:r>
+            <a:r>
+              <a:rPr sz="1600">
+                <a:solidFill>
+                  <a:srgbClr val="EEFFFF"/>
+                </a:solidFill>
+                <a:latin typeface="Consolas"/>
+              </a:rPr>
+              <a:t>b</a:t>
+            </a:r>
+            <a:r>
+              <a:rPr sz="1600">
+                <a:solidFill>
+                  <a:srgbClr val="BAC2DE"/>
+                </a:solidFill>
+                <a:latin typeface="Consolas"/>
+              </a:rPr>
+              <a:t>,</a:t>
+            </a:r>
+            <a:r>
+              <a:rPr sz="1600">
+                <a:solidFill>
+                  <a:srgbClr val="EEFFFF"/>
+                </a:solidFill>
+                <a:latin typeface="Consolas"/>
+              </a:rPr>
+              <a:t> </a:t>
+            </a:r>
+            <a:r>
+              <a:rPr sz="1600">
+                <a:solidFill>
+                  <a:srgbClr val="89DDFF"/>
+                </a:solidFill>
+                <a:latin typeface="Consolas"/>
+              </a:rPr>
+              <a:t>&amp;</a:t>
+            </a:r>
+            <a:r>
+              <a:rPr sz="1600">
+                <a:solidFill>
+                  <a:srgbClr val="EEFFFF"/>
+                </a:solidFill>
+                <a:latin typeface="Consolas"/>
+              </a:rPr>
+              <a:t>c</a:t>
+            </a:r>
+            <a:r>
+              <a:rPr sz="1600">
+                <a:solidFill>
+                  <a:srgbClr val="BAC2DE"/>
+                </a:solidFill>
+                <a:latin typeface="Consolas"/>
+              </a:rPr>
+              <a:t>]</a:t>
+            </a:r>
+            <a:r>
+              <a:rPr sz="1600">
+                <a:solidFill>
+                  <a:srgbClr val="BAC2DE"/>
+                </a:solidFill>
+                <a:latin typeface="Consolas"/>
+              </a:rPr>
+              <a:t>.</a:t>
+            </a:r>
+            <a:r>
+              <a:rPr sz="1600">
+                <a:solidFill>
+                  <a:srgbClr val="C792EA"/>
+                </a:solidFill>
+                <a:latin typeface="Consolas"/>
+              </a:rPr>
+              <a:t>union</a:t>
+            </a:r>
+            <a:r>
+              <a:rPr sz="1600">
+                <a:solidFill>
+                  <a:srgbClr val="BAC2DE"/>
+                </a:solidFill>
+                <a:latin typeface="Consolas"/>
+              </a:rPr>
+              <a:t>(</a:t>
+            </a:r>
+            <a:r>
+              <a:rPr sz="1600">
+                <a:solidFill>
+                  <a:srgbClr val="BAC2DE"/>
+                </a:solidFill>
+                <a:latin typeface="Consolas"/>
+              </a:rPr>
+              <a:t>)</a:t>
+            </a:r>
+            <a:r>
+              <a:rPr sz="1600">
+                <a:solidFill>
+                  <a:srgbClr val="BAC2DE"/>
+                </a:solidFill>
+                <a:latin typeface="Consolas"/>
+              </a:rPr>
+              <a:t>,</a:t>
+            </a:r>
+            <a:r>
+              <a:rPr sz="1600">
+                <a:solidFill>
+                  <a:srgbClr val="EEFFFF"/>
+                </a:solidFill>
+                <a:latin typeface="Consolas"/>
+              </a:rPr>
+              <a:t> </a:t>
+            </a:r>
+            <a:r>
+              <a:rPr sz="1600">
+                <a:solidFill>
+                  <a:srgbClr val="EEFFFF"/>
+                </a:solidFill>
+                <a:latin typeface="Consolas"/>
+              </a:rPr>
+              <a:t>expected</a:t>
+            </a:r>
+            <a:r>
+              <a:rPr sz="1600">
+                <a:solidFill>
+                  <a:srgbClr val="BAC2DE"/>
+                </a:solidFill>
+                <a:latin typeface="Consolas"/>
+              </a:rPr>
+              <a:t>)</a:t>
+            </a:r>
+            <a:r>
+              <a:rPr sz="1600">
+                <a:solidFill>
+                  <a:srgbClr val="BAC2DE"/>
+                </a:solidFill>
+                <a:latin typeface="Consolas"/>
+              </a:rPr>
+              <a:t>;</a:t>
+            </a:r>
+          </a:p>
+          <a:p>
+            <a:pPr>
+              <a:lnSpc>
+                <a:spcPct val="95000"/>
+              </a:lnSpc>
+              <a:spcBef>
+                <a:spcPts val="0"/>
+              </a:spcBef>
+              <a:spcAft>
+                <a:spcPts val="0"/>
+              </a:spcAft>
+            </a:pPr>
+            <a:r>
+              <a:rPr sz="1600">
+                <a:solidFill>
+                  <a:srgbClr val="EEFFFF"/>
+                </a:solidFill>
+                <a:latin typeface="Consolas"/>
+              </a:rPr>
+              <a:t>    </a:t>
+            </a:r>
+            <a:r>
+              <a:rPr sz="1600">
+                <a:solidFill>
+                  <a:srgbClr val="6A9955"/>
+                </a:solidFill>
+                <a:latin typeface="Consolas"/>
+              </a:rPr>
+              <a:t>// An array of sets can be unioned together.</a:t>
+            </a:r>
+          </a:p>
+          <a:p>
+            <a:pPr>
+              <a:lnSpc>
+                <a:spcPct val="95000"/>
+              </a:lnSpc>
+              <a:spcBef>
+                <a:spcPts val="0"/>
+              </a:spcBef>
+              <a:spcAft>
+                <a:spcPts val="0"/>
+              </a:spcAft>
+            </a:pPr>
+            <a:r>
+              <a:rPr sz="1600">
+                <a:solidFill>
+                  <a:srgbClr val="EEFFFF"/>
+                </a:solidFill>
+                <a:latin typeface="Consolas"/>
+              </a:rPr>
+              <a:t>    </a:t>
+            </a:r>
+            <a:r>
+              <a:rPr sz="1600">
+                <a:solidFill>
+                  <a:srgbClr val="82AAFF"/>
+                </a:solidFill>
+                <a:latin typeface="Consolas"/>
+              </a:rPr>
+              <a:t>assert_eq!</a:t>
+            </a:r>
+            <a:r>
+              <a:rPr sz="1600">
+                <a:solidFill>
+                  <a:srgbClr val="BAC2DE"/>
+                </a:solidFill>
+                <a:latin typeface="Consolas"/>
+              </a:rPr>
+              <a:t>(</a:t>
+            </a:r>
+            <a:r>
+              <a:rPr sz="1600">
+                <a:solidFill>
+                  <a:srgbClr val="BAC2DE"/>
+                </a:solidFill>
+                <a:latin typeface="Consolas"/>
+              </a:rPr>
+              <a:t>[</a:t>
+            </a:r>
+            <a:r>
+              <a:rPr sz="1600">
+                <a:solidFill>
+                  <a:srgbClr val="89DDFF"/>
+                </a:solidFill>
+                <a:latin typeface="Consolas"/>
+              </a:rPr>
+              <a:t>&amp;</a:t>
+            </a:r>
+            <a:r>
+              <a:rPr sz="1600">
+                <a:solidFill>
+                  <a:srgbClr val="EEFFFF"/>
+                </a:solidFill>
+                <a:latin typeface="Consolas"/>
+              </a:rPr>
+              <a:t>a</a:t>
+            </a:r>
+            <a:r>
+              <a:rPr sz="1600">
+                <a:solidFill>
+                  <a:srgbClr val="BAC2DE"/>
+                </a:solidFill>
+                <a:latin typeface="Consolas"/>
+              </a:rPr>
+              <a:t>,</a:t>
+            </a:r>
+            <a:r>
+              <a:rPr sz="1600">
+                <a:solidFill>
+                  <a:srgbClr val="EEFFFF"/>
+                </a:solidFill>
+                <a:latin typeface="Consolas"/>
+              </a:rPr>
+              <a:t> </a:t>
+            </a:r>
+            <a:r>
+              <a:rPr sz="1600">
+                <a:solidFill>
+                  <a:srgbClr val="89DDFF"/>
+                </a:solidFill>
+                <a:latin typeface="Consolas"/>
+              </a:rPr>
+              <a:t>&amp;</a:t>
+            </a:r>
+            <a:r>
+              <a:rPr sz="1600">
+                <a:solidFill>
+                  <a:srgbClr val="EEFFFF"/>
+                </a:solidFill>
+                <a:latin typeface="Consolas"/>
+              </a:rPr>
+              <a:t>b</a:t>
+            </a:r>
+            <a:r>
+              <a:rPr sz="1600">
+                <a:solidFill>
+                  <a:srgbClr val="BAC2DE"/>
+                </a:solidFill>
+                <a:latin typeface="Consolas"/>
+              </a:rPr>
+              <a:t>,</a:t>
+            </a:r>
+            <a:r>
+              <a:rPr sz="1600">
+                <a:solidFill>
+                  <a:srgbClr val="EEFFFF"/>
+                </a:solidFill>
+                <a:latin typeface="Consolas"/>
+              </a:rPr>
+              <a:t> </a:t>
+            </a:r>
+            <a:r>
+              <a:rPr sz="1600">
+                <a:solidFill>
+                  <a:srgbClr val="89DDFF"/>
+                </a:solidFill>
+                <a:latin typeface="Consolas"/>
+              </a:rPr>
+              <a:t>&amp;</a:t>
+            </a:r>
+            <a:r>
+              <a:rPr sz="1600">
+                <a:solidFill>
+                  <a:srgbClr val="EEFFFF"/>
+                </a:solidFill>
+                <a:latin typeface="Consolas"/>
+              </a:rPr>
+              <a:t>c</a:t>
+            </a:r>
+            <a:r>
+              <a:rPr sz="1600">
+                <a:solidFill>
+                  <a:srgbClr val="BAC2DE"/>
+                </a:solidFill>
+                <a:latin typeface="Consolas"/>
+              </a:rPr>
+              <a:t>]</a:t>
+            </a:r>
+            <a:r>
+              <a:rPr sz="1600">
+                <a:solidFill>
+                  <a:srgbClr val="BAC2DE"/>
+                </a:solidFill>
+                <a:latin typeface="Consolas"/>
+              </a:rPr>
+              <a:t>.</a:t>
+            </a:r>
+            <a:r>
+              <a:rPr sz="1600">
+                <a:solidFill>
+                  <a:srgbClr val="C792EA"/>
+                </a:solidFill>
+                <a:latin typeface="Consolas"/>
+              </a:rPr>
+              <a:t>union</a:t>
+            </a:r>
+            <a:r>
+              <a:rPr sz="1600">
+                <a:solidFill>
+                  <a:srgbClr val="BAC2DE"/>
+                </a:solidFill>
+                <a:latin typeface="Consolas"/>
+              </a:rPr>
+              <a:t>(</a:t>
+            </a:r>
+            <a:r>
+              <a:rPr sz="1600">
+                <a:solidFill>
+                  <a:srgbClr val="BAC2DE"/>
+                </a:solidFill>
+                <a:latin typeface="Consolas"/>
+              </a:rPr>
+              <a:t>)</a:t>
+            </a:r>
+            <a:r>
+              <a:rPr sz="1600">
+                <a:solidFill>
+                  <a:srgbClr val="BAC2DE"/>
+                </a:solidFill>
+                <a:latin typeface="Consolas"/>
+              </a:rPr>
+              <a:t>,</a:t>
+            </a:r>
+            <a:r>
+              <a:rPr sz="1600">
+                <a:solidFill>
+                  <a:srgbClr val="EEFFFF"/>
+                </a:solidFill>
+                <a:latin typeface="Consolas"/>
+              </a:rPr>
+              <a:t> </a:t>
+            </a:r>
+            <a:r>
+              <a:rPr sz="1600">
+                <a:solidFill>
+                  <a:srgbClr val="EEFFFF"/>
+                </a:solidFill>
+                <a:latin typeface="Consolas"/>
+              </a:rPr>
+              <a:t>expected</a:t>
+            </a:r>
+            <a:r>
+              <a:rPr sz="1600">
+                <a:solidFill>
+                  <a:srgbClr val="BAC2DE"/>
+                </a:solidFill>
+                <a:latin typeface="Consolas"/>
+              </a:rPr>
+              <a:t>)</a:t>
+            </a:r>
+            <a:r>
+              <a:rPr sz="1600">
+                <a:solidFill>
+                  <a:srgbClr val="BAC2DE"/>
+                </a:solidFill>
+                <a:latin typeface="Consolas"/>
+              </a:rPr>
+              <a:t>;</a:t>
+            </a:r>
+          </a:p>
+          <a:p>
+            <a:pPr>
+              <a:lnSpc>
+                <a:spcPct val="95000"/>
+              </a:lnSpc>
+              <a:spcBef>
+                <a:spcPts val="0"/>
+              </a:spcBef>
+              <a:spcAft>
+                <a:spcPts val="0"/>
+              </a:spcAft>
+            </a:pPr>
+            <a:r>
+              <a:rPr sz="1600">
+                <a:solidFill>
+                  <a:srgbClr val="EEFFFF"/>
+                </a:solidFill>
+                <a:latin typeface="Consolas"/>
+              </a:rPr>
+              <a:t>    </a:t>
+            </a:r>
+            <a:r>
+              <a:rPr sz="1600">
+                <a:solidFill>
+                  <a:srgbClr val="6A9955"/>
+                </a:solidFill>
+                <a:latin typeface="Consolas"/>
+              </a:rPr>
+              <a:t>// A filtered option can be unioned.</a:t>
+            </a:r>
+          </a:p>
+          <a:p>
+            <a:pPr>
+              <a:lnSpc>
+                <a:spcPct val="95000"/>
+              </a:lnSpc>
+              <a:spcBef>
+                <a:spcPts val="0"/>
+              </a:spcBef>
+              <a:spcAft>
+                <a:spcPts val="0"/>
+              </a:spcAft>
+            </a:pPr>
+            <a:r>
+              <a:rPr sz="1600">
+                <a:solidFill>
+                  <a:srgbClr val="EEFFFF"/>
+                </a:solidFill>
+                <a:latin typeface="Consolas"/>
+              </a:rPr>
+              <a:t>    </a:t>
+            </a:r>
+            <a:r>
+              <a:rPr sz="1600">
+                <a:solidFill>
+                  <a:srgbClr val="82AAFF"/>
+                </a:solidFill>
+                <a:latin typeface="Consolas"/>
+              </a:rPr>
+              <a:t>assert_eq!</a:t>
+            </a:r>
+            <a:r>
+              <a:rPr sz="1600">
+                <a:solidFill>
+                  <a:srgbClr val="BAC2DE"/>
+                </a:solidFill>
+                <a:latin typeface="Consolas"/>
+              </a:rPr>
+              <a:t>(</a:t>
+            </a:r>
+            <a:r>
+              <a:rPr sz="1600">
+                <a:solidFill>
+                  <a:srgbClr val="89DDFF"/>
+                </a:solidFill>
+                <a:latin typeface="Consolas"/>
+              </a:rPr>
+              <a:t>Some</a:t>
+            </a:r>
+            <a:r>
+              <a:rPr sz="1600">
+                <a:solidFill>
+                  <a:srgbClr val="BAC2DE"/>
+                </a:solidFill>
+                <a:latin typeface="Consolas"/>
+              </a:rPr>
+              <a:t>(</a:t>
+            </a:r>
+            <a:r>
+              <a:rPr sz="1600">
+                <a:solidFill>
+                  <a:srgbClr val="89DDFF"/>
+                </a:solidFill>
+                <a:latin typeface="Consolas"/>
+              </a:rPr>
+              <a:t>&amp;</a:t>
+            </a:r>
+            <a:r>
+              <a:rPr sz="1600">
+                <a:solidFill>
+                  <a:srgbClr val="EEFFFF"/>
+                </a:solidFill>
+                <a:latin typeface="Consolas"/>
+              </a:rPr>
+              <a:t>a</a:t>
+            </a:r>
+            <a:r>
+              <a:rPr sz="1600">
+                <a:solidFill>
+                  <a:srgbClr val="BAC2DE"/>
+                </a:solidFill>
+                <a:latin typeface="Consolas"/>
+              </a:rPr>
+              <a:t>)</a:t>
+            </a:r>
+            <a:r>
+              <a:rPr sz="1600">
+                <a:solidFill>
+                  <a:srgbClr val="BAC2DE"/>
+                </a:solidFill>
+                <a:latin typeface="Consolas"/>
+              </a:rPr>
+              <a:t>.</a:t>
+            </a:r>
+            <a:r>
+              <a:rPr sz="1600">
+                <a:solidFill>
+                  <a:srgbClr val="EEFFFF"/>
+                </a:solidFill>
+                <a:latin typeface="Consolas"/>
+              </a:rPr>
+              <a:t>filter</a:t>
+            </a:r>
+            <a:r>
+              <a:rPr sz="1600">
+                <a:solidFill>
+                  <a:srgbClr val="BAC2DE"/>
+                </a:solidFill>
+                <a:latin typeface="Consolas"/>
+              </a:rPr>
+              <a:t>(</a:t>
+            </a:r>
+            <a:r>
+              <a:rPr sz="1600">
+                <a:solidFill>
+                  <a:srgbClr val="89DDFF"/>
+                </a:solidFill>
+                <a:latin typeface="Consolas"/>
+              </a:rPr>
+              <a:t>|</a:t>
+            </a:r>
+            <a:r>
+              <a:rPr sz="1600">
+                <a:solidFill>
+                  <a:srgbClr val="EEFFFF"/>
+                </a:solidFill>
+                <a:latin typeface="Consolas"/>
+              </a:rPr>
+              <a:t>set</a:t>
+            </a:r>
+            <a:r>
+              <a:rPr sz="1600">
+                <a:solidFill>
+                  <a:srgbClr val="89DDFF"/>
+                </a:solidFill>
+                <a:latin typeface="Consolas"/>
+              </a:rPr>
+              <a:t>|</a:t>
+            </a:r>
+            <a:r>
+              <a:rPr sz="1600">
+                <a:solidFill>
+                  <a:srgbClr val="EEFFFF"/>
+                </a:solidFill>
+                <a:latin typeface="Consolas"/>
+              </a:rPr>
+              <a:t> </a:t>
+            </a:r>
+            <a:r>
+              <a:rPr sz="1600">
+                <a:solidFill>
+                  <a:srgbClr val="89DDFF"/>
+                </a:solidFill>
+                <a:latin typeface="Consolas"/>
+              </a:rPr>
+              <a:t>!</a:t>
+            </a:r>
+            <a:r>
+              <a:rPr sz="1600">
+                <a:solidFill>
+                  <a:srgbClr val="EEFFFF"/>
+                </a:solidFill>
+                <a:latin typeface="Consolas"/>
+              </a:rPr>
+              <a:t>set</a:t>
+            </a:r>
+            <a:r>
+              <a:rPr sz="1600">
+                <a:solidFill>
+                  <a:srgbClr val="BAC2DE"/>
+                </a:solidFill>
+                <a:latin typeface="Consolas"/>
+              </a:rPr>
+              <a:t>.</a:t>
+            </a:r>
+            <a:r>
+              <a:rPr sz="1600">
+                <a:solidFill>
+                  <a:srgbClr val="EEFFFF"/>
+                </a:solidFill>
+                <a:latin typeface="Consolas"/>
+              </a:rPr>
+              <a:t>is_empty</a:t>
+            </a:r>
+            <a:r>
+              <a:rPr sz="1600">
+                <a:solidFill>
+                  <a:srgbClr val="BAC2DE"/>
+                </a:solidFill>
+                <a:latin typeface="Consolas"/>
+              </a:rPr>
+              <a:t>(</a:t>
+            </a:r>
+            <a:r>
+              <a:rPr sz="1600">
+                <a:solidFill>
+                  <a:srgbClr val="BAC2DE"/>
+                </a:solidFill>
+                <a:latin typeface="Consolas"/>
+              </a:rPr>
+              <a:t>)</a:t>
+            </a:r>
+            <a:r>
+              <a:rPr sz="1600">
+                <a:solidFill>
+                  <a:srgbClr val="BAC2DE"/>
+                </a:solidFill>
+                <a:latin typeface="Consolas"/>
+              </a:rPr>
+              <a:t>)</a:t>
+            </a:r>
+            <a:r>
+              <a:rPr sz="1600">
+                <a:solidFill>
+                  <a:srgbClr val="BAC2DE"/>
+                </a:solidFill>
+                <a:latin typeface="Consolas"/>
+              </a:rPr>
+              <a:t>.</a:t>
+            </a:r>
+            <a:r>
+              <a:rPr sz="1600">
+                <a:solidFill>
+                  <a:srgbClr val="C792EA"/>
+                </a:solidFill>
+                <a:latin typeface="Consolas"/>
+              </a:rPr>
+              <a:t>union</a:t>
+            </a:r>
+            <a:r>
+              <a:rPr sz="1600">
+                <a:solidFill>
+                  <a:srgbClr val="BAC2DE"/>
+                </a:solidFill>
+                <a:latin typeface="Consolas"/>
+              </a:rPr>
+              <a:t>(</a:t>
+            </a:r>
+            <a:r>
+              <a:rPr sz="1600">
+                <a:solidFill>
+                  <a:srgbClr val="BAC2DE"/>
+                </a:solidFill>
+                <a:latin typeface="Consolas"/>
+              </a:rPr>
+              <a:t>)</a:t>
+            </a:r>
+            <a:r>
+              <a:rPr sz="1600">
+                <a:solidFill>
+                  <a:srgbClr val="BAC2DE"/>
+                </a:solidFill>
+                <a:latin typeface="Consolas"/>
+              </a:rPr>
+              <a:t>,</a:t>
+            </a:r>
+            <a:r>
+              <a:rPr sz="1600">
+                <a:solidFill>
+                  <a:srgbClr val="EEFFFF"/>
+                </a:solidFill>
+                <a:latin typeface="Consolas"/>
+              </a:rPr>
+              <a:t> </a:t>
+            </a:r>
+            <a:r>
+              <a:rPr sz="1600">
+                <a:solidFill>
+                  <a:srgbClr val="EEFFFF"/>
+                </a:solidFill>
+                <a:latin typeface="Consolas"/>
+              </a:rPr>
+              <a:t>a</a:t>
+            </a:r>
+            <a:r>
+              <a:rPr sz="1600">
+                <a:solidFill>
+                  <a:srgbClr val="BAC2DE"/>
+                </a:solidFill>
+                <a:latin typeface="Consolas"/>
+              </a:rPr>
+              <a:t>)</a:t>
+            </a:r>
+            <a:r>
+              <a:rPr sz="1600">
+                <a:solidFill>
+                  <a:srgbClr val="BAC2DE"/>
+                </a:solidFill>
+                <a:latin typeface="Consolas"/>
+              </a:rPr>
+              <a:t>;</a:t>
+            </a:r>
+          </a:p>
+          <a:p>
+            <a:pPr>
+              <a:lnSpc>
+                <a:spcPct val="95000"/>
+              </a:lnSpc>
+              <a:spcBef>
+                <a:spcPts val="0"/>
+              </a:spcBef>
+              <a:spcAft>
+                <a:spcPts val="0"/>
+              </a:spcAft>
+            </a:pPr>
+            <a:r>
+              <a:rPr sz="1600">
+                <a:solidFill>
+                  <a:srgbClr val="BAC2DE"/>
+                </a:solidFill>
+                <a:latin typeface="Consolas"/>
+              </a:rPr>
+              <a:t>}</a:t>
             </a:r>
           </a:p>
         </p:txBody>

--- a/docs/example6_walkthrough.pptx
+++ b/docs/example6_walkthrough.pptx
@@ -10,7 +10,7 @@
     <p:sldId id="258" r:id="rId9"/>
     <p:sldId id="259" r:id="rId10"/>
   </p:sldIdLst>
-  <p:sldSz cx="9144000" cy="6858000" type="screen4x3"/>
+  <p:sldSz cx="12192000" cy="6858000" type="screen4x3"/>
   <p:notesSz cx="6858000" cy="9144000"/>
   <p:defaultTextStyle>
     <a:defPPr>
@@ -3100,7 +3100,7 @@
         <p:spPr>
           <a:xfrm>
             <a:off x="0" y="0"/>
-            <a:ext cx="9144000" cy="6858000"/>
+            <a:ext cx="12192000" cy="6858000"/>
           </a:xfrm>
           <a:prstGeom prst="rect">
             <a:avLst/>
@@ -3142,7 +3142,7 @@
         </p:nvSpPr>
         <p:spPr>
           <a:xfrm>
-            <a:off x="7543800" y="0"/>
+            <a:off x="10591800" y="0"/>
             <a:ext cx="1600200" cy="6858000"/>
           </a:xfrm>
           <a:prstGeom prst="rect">
@@ -3187,7 +3187,7 @@
         </p:nvSpPr>
         <p:spPr>
           <a:xfrm rot="16200000">
-            <a:off x="7616952" y="274320"/>
+            <a:off x="10664952" y="274320"/>
             <a:ext cx="1453896" cy="6309360"/>
           </a:xfrm>
           <a:prstGeom prst="rect">
@@ -3224,7 +3224,7 @@
         <p:spPr>
           <a:xfrm>
             <a:off x="731520" y="502920"/>
-            <a:ext cx="6446520" cy="1051560"/>
+            <a:ext cx="9494520" cy="1051560"/>
           </a:xfrm>
           <a:prstGeom prst="rect">
             <a:avLst/>
@@ -3301,7 +3301,7 @@
         </p:blipFill>
         <p:spPr>
           <a:xfrm>
-            <a:off x="433134" y="1691640"/>
+            <a:off x="1957134" y="1691640"/>
             <a:ext cx="6677530" cy="4846320"/>
           </a:xfrm>
           <a:prstGeom prst="rect">
@@ -3336,7 +3336,7 @@
         <p:spPr>
           <a:xfrm>
             <a:off x="0" y="0"/>
-            <a:ext cx="9144000" cy="6858000"/>
+            <a:ext cx="12192000" cy="6858000"/>
           </a:xfrm>
           <a:prstGeom prst="rect">
             <a:avLst/>
@@ -3379,7 +3379,7 @@
         <p:spPr>
           <a:xfrm>
             <a:off x="164592" y="109728"/>
-            <a:ext cx="8814816" cy="6638544"/>
+            <a:ext cx="11862816" cy="6638544"/>
           </a:xfrm>
           <a:prstGeom prst="rect">
             <a:avLst/>
@@ -4838,7 +4838,7 @@
         <p:spPr>
           <a:xfrm>
             <a:off x="0" y="0"/>
-            <a:ext cx="9144000" cy="6858000"/>
+            <a:ext cx="12192000" cy="6858000"/>
           </a:xfrm>
           <a:prstGeom prst="rect">
             <a:avLst/>
@@ -4881,7 +4881,7 @@
         <p:spPr>
           <a:xfrm>
             <a:off x="164592" y="109728"/>
-            <a:ext cx="8814816" cy="6638544"/>
+            <a:ext cx="11862816" cy="6638544"/>
           </a:xfrm>
           <a:prstGeom prst="rect">
             <a:avLst/>
@@ -6808,7 +6808,7 @@
         <p:spPr>
           <a:xfrm>
             <a:off x="0" y="0"/>
-            <a:ext cx="9144000" cy="6858000"/>
+            <a:ext cx="12192000" cy="6858000"/>
           </a:xfrm>
           <a:prstGeom prst="rect">
             <a:avLst/>
@@ -6851,7 +6851,7 @@
         <p:spPr>
           <a:xfrm>
             <a:off x="164592" y="109728"/>
-            <a:ext cx="8814816" cy="6638544"/>
+            <a:ext cx="11862816" cy="6638544"/>
           </a:xfrm>
           <a:prstGeom prst="rect">
             <a:avLst/>
